--- a/Pregrado/Creatividad y pensamiento innovador/Clases/Sesion 03 - Gestión de la innovación (Manual de Oslo OCDE)/Presentacion.pptx
+++ b/Pregrado/Creatividad y pensamiento innovador/Clases/Sesion 03 - Gestión de la innovación (Manual de Oslo OCDE)/Presentacion.pptx
@@ -3368,41 +3368,6 @@
           </a:p>
         </p:txBody>
       </p:sp>
-      <p:sp>
-        <p:nvSpPr>
-          <p:cNvPr id="7" name="TextBox 6"/>
-          <p:cNvSpPr txBox="1"/>
-          <p:nvPr/>
-        </p:nvSpPr>
-        <p:spPr>
-          <a:xfrm>
-            <a:off x="2194560" y="6446520"/>
-            <a:ext cx="5943600" cy="274320"/>
-          </a:xfrm>
-          <a:prstGeom prst="rect">
-            <a:avLst/>
-          </a:prstGeom>
-          <a:noFill/>
-        </p:spPr>
-        <p:txBody>
-          <a:bodyPr wrap="square" anchor="t" lIns="0" rIns="0" tIns="0" bIns="0">
-            <a:spAutoFit/>
-          </a:bodyPr>
-          <a:lstStyle/>
-          <a:p>
-            <a:pPr algn="l"/>
-            <a:r>
-              <a:rPr sz="1000" b="1" i="0">
-                <a:solidFill>
-                  <a:srgbClr val="8F989D"/>
-                </a:solidFill>
-                <a:latin typeface="Calibri"/>
-              </a:rPr>
-              <a:t>Inicio 5:10 pm</a:t>
-            </a:r>
-          </a:p>
-        </p:txBody>
-      </p:sp>
     </p:spTree>
   </p:cSld>
   <p:clrMapOvr>
@@ -3591,41 +3556,6 @@
         </p:nvSpPr>
         <p:spPr>
           <a:xfrm>
-            <a:off x="2194560" y="6446520"/>
-            <a:ext cx="5943600" cy="274320"/>
-          </a:xfrm>
-          <a:prstGeom prst="rect">
-            <a:avLst/>
-          </a:prstGeom>
-          <a:noFill/>
-        </p:spPr>
-        <p:txBody>
-          <a:bodyPr wrap="square" anchor="t" lIns="0" rIns="0" tIns="0" bIns="0">
-            <a:spAutoFit/>
-          </a:bodyPr>
-          <a:lstStyle/>
-          <a:p>
-            <a:pPr algn="l"/>
-            <a:r>
-              <a:rPr sz="1000" b="1" i="0">
-                <a:solidFill>
-                  <a:srgbClr val="8F989D"/>
-                </a:solidFill>
-                <a:latin typeface="Calibri"/>
-              </a:rPr>
-              <a:t>Inicio 5:10 pm</a:t>
-            </a:r>
-          </a:p>
-        </p:txBody>
-      </p:sp>
-      <p:sp>
-        <p:nvSpPr>
-          <p:cNvPr id="6" name="TextBox 5"/>
-          <p:cNvSpPr txBox="1"/>
-          <p:nvPr/>
-        </p:nvSpPr>
-        <p:spPr>
-          <a:xfrm>
             <a:off x="11094415" y="6446520"/>
             <a:ext cx="548640" cy="274320"/>
           </a:xfrm>
@@ -3993,41 +3923,6 @@
         </p:nvSpPr>
         <p:spPr>
           <a:xfrm>
-            <a:off x="2194560" y="6446520"/>
-            <a:ext cx="5943600" cy="274320"/>
-          </a:xfrm>
-          <a:prstGeom prst="rect">
-            <a:avLst/>
-          </a:prstGeom>
-          <a:noFill/>
-        </p:spPr>
-        <p:txBody>
-          <a:bodyPr wrap="square" anchor="t" lIns="0" rIns="0" tIns="0" bIns="0">
-            <a:spAutoFit/>
-          </a:bodyPr>
-          <a:lstStyle/>
-          <a:p>
-            <a:pPr algn="l"/>
-            <a:r>
-              <a:rPr sz="1000" b="1" i="0">
-                <a:solidFill>
-                  <a:srgbClr val="8F989D"/>
-                </a:solidFill>
-                <a:latin typeface="Calibri"/>
-              </a:rPr>
-              <a:t>Inicio 5:10 pm</a:t>
-            </a:r>
-          </a:p>
-        </p:txBody>
-      </p:sp>
-      <p:sp>
-        <p:nvSpPr>
-          <p:cNvPr id="6" name="TextBox 5"/>
-          <p:cNvSpPr txBox="1"/>
-          <p:nvPr/>
-        </p:nvSpPr>
-        <p:spPr>
-          <a:xfrm>
             <a:off x="11094415" y="6446520"/>
             <a:ext cx="548640" cy="274320"/>
           </a:xfrm>
@@ -4309,41 +4204,6 @@
         </p:nvSpPr>
         <p:spPr>
           <a:xfrm>
-            <a:off x="2194560" y="6446520"/>
-            <a:ext cx="5943600" cy="274320"/>
-          </a:xfrm>
-          <a:prstGeom prst="rect">
-            <a:avLst/>
-          </a:prstGeom>
-          <a:noFill/>
-        </p:spPr>
-        <p:txBody>
-          <a:bodyPr wrap="square" anchor="t" lIns="0" rIns="0" tIns="0" bIns="0">
-            <a:spAutoFit/>
-          </a:bodyPr>
-          <a:lstStyle/>
-          <a:p>
-            <a:pPr algn="l"/>
-            <a:r>
-              <a:rPr sz="1000" b="1" i="0">
-                <a:solidFill>
-                  <a:srgbClr val="8F989D"/>
-                </a:solidFill>
-                <a:latin typeface="Calibri"/>
-              </a:rPr>
-              <a:t>Inicio 5:10 pm</a:t>
-            </a:r>
-          </a:p>
-        </p:txBody>
-      </p:sp>
-      <p:sp>
-        <p:nvSpPr>
-          <p:cNvPr id="6" name="TextBox 5"/>
-          <p:cNvSpPr txBox="1"/>
-          <p:nvPr/>
-        </p:nvSpPr>
-        <p:spPr>
-          <a:xfrm>
             <a:off x="11094415" y="6446520"/>
             <a:ext cx="548640" cy="274320"/>
           </a:xfrm>
@@ -4937,41 +4797,6 @@
         </p:nvSpPr>
         <p:spPr>
           <a:xfrm>
-            <a:off x="2194560" y="6446520"/>
-            <a:ext cx="5943600" cy="274320"/>
-          </a:xfrm>
-          <a:prstGeom prst="rect">
-            <a:avLst/>
-          </a:prstGeom>
-          <a:noFill/>
-        </p:spPr>
-        <p:txBody>
-          <a:bodyPr wrap="square" anchor="t" lIns="0" rIns="0" tIns="0" bIns="0">
-            <a:spAutoFit/>
-          </a:bodyPr>
-          <a:lstStyle/>
-          <a:p>
-            <a:pPr algn="l"/>
-            <a:r>
-              <a:rPr sz="1000" b="1" i="0">
-                <a:solidFill>
-                  <a:srgbClr val="8F989D"/>
-                </a:solidFill>
-                <a:latin typeface="Calibri"/>
-              </a:rPr>
-              <a:t>Inicio 5:10 pm</a:t>
-            </a:r>
-          </a:p>
-        </p:txBody>
-      </p:sp>
-      <p:sp>
-        <p:nvSpPr>
-          <p:cNvPr id="11" name="TextBox 10"/>
-          <p:cNvSpPr txBox="1"/>
-          <p:nvPr/>
-        </p:nvSpPr>
-        <p:spPr>
-          <a:xfrm>
             <a:off x="11094415" y="6446520"/>
             <a:ext cx="548640" cy="274320"/>
           </a:xfrm>
@@ -5475,41 +5300,6 @@
         </p:nvSpPr>
         <p:spPr>
           <a:xfrm>
-            <a:off x="2194560" y="6446520"/>
-            <a:ext cx="5943600" cy="274320"/>
-          </a:xfrm>
-          <a:prstGeom prst="rect">
-            <a:avLst/>
-          </a:prstGeom>
-          <a:noFill/>
-        </p:spPr>
-        <p:txBody>
-          <a:bodyPr wrap="square" anchor="t" lIns="0" rIns="0" tIns="0" bIns="0">
-            <a:spAutoFit/>
-          </a:bodyPr>
-          <a:lstStyle/>
-          <a:p>
-            <a:pPr algn="l"/>
-            <a:r>
-              <a:rPr sz="1000" b="1" i="0">
-                <a:solidFill>
-                  <a:srgbClr val="8F989D"/>
-                </a:solidFill>
-                <a:latin typeface="Calibri"/>
-              </a:rPr>
-              <a:t>Inicio 5:10 pm</a:t>
-            </a:r>
-          </a:p>
-        </p:txBody>
-      </p:sp>
-      <p:sp>
-        <p:nvSpPr>
-          <p:cNvPr id="11" name="TextBox 10"/>
-          <p:cNvSpPr txBox="1"/>
-          <p:nvPr/>
-        </p:nvSpPr>
-        <p:spPr>
-          <a:xfrm>
             <a:off x="11094415" y="6446520"/>
             <a:ext cx="548640" cy="274320"/>
           </a:xfrm>
@@ -6082,41 +5872,6 @@
       <p:sp>
         <p:nvSpPr>
           <p:cNvPr id="5" name="TextBox 4"/>
-          <p:cNvSpPr txBox="1"/>
-          <p:nvPr/>
-        </p:nvSpPr>
-        <p:spPr>
-          <a:xfrm>
-            <a:off x="2194560" y="6446520"/>
-            <a:ext cx="5943600" cy="274320"/>
-          </a:xfrm>
-          <a:prstGeom prst="rect">
-            <a:avLst/>
-          </a:prstGeom>
-          <a:noFill/>
-        </p:spPr>
-        <p:txBody>
-          <a:bodyPr wrap="square" anchor="t" lIns="0" rIns="0" tIns="0" bIns="0">
-            <a:spAutoFit/>
-          </a:bodyPr>
-          <a:lstStyle/>
-          <a:p>
-            <a:pPr algn="l"/>
-            <a:r>
-              <a:rPr sz="1000" b="1" i="0">
-                <a:solidFill>
-                  <a:srgbClr val="8F989D"/>
-                </a:solidFill>
-                <a:latin typeface="Calibri"/>
-              </a:rPr>
-              <a:t>Inicio 5:10 pm</a:t>
-            </a:r>
-          </a:p>
-        </p:txBody>
-      </p:sp>
-      <p:sp>
-        <p:nvSpPr>
-          <p:cNvPr id="6" name="TextBox 5"/>
           <p:cNvSpPr txBox="1"/>
           <p:nvPr/>
         </p:nvSpPr>
@@ -6787,41 +6542,6 @@
         </p:nvSpPr>
         <p:spPr>
           <a:xfrm>
-            <a:off x="2194560" y="6446520"/>
-            <a:ext cx="5943600" cy="274320"/>
-          </a:xfrm>
-          <a:prstGeom prst="rect">
-            <a:avLst/>
-          </a:prstGeom>
-          <a:noFill/>
-        </p:spPr>
-        <p:txBody>
-          <a:bodyPr wrap="square" anchor="t" lIns="0" rIns="0" tIns="0" bIns="0">
-            <a:spAutoFit/>
-          </a:bodyPr>
-          <a:lstStyle/>
-          <a:p>
-            <a:pPr algn="l"/>
-            <a:r>
-              <a:rPr sz="1000" b="1" i="0">
-                <a:solidFill>
-                  <a:srgbClr val="8F989D"/>
-                </a:solidFill>
-                <a:latin typeface="Calibri"/>
-              </a:rPr>
-              <a:t>Inicio 5:10 pm</a:t>
-            </a:r>
-          </a:p>
-        </p:txBody>
-      </p:sp>
-      <p:sp>
-        <p:nvSpPr>
-          <p:cNvPr id="7" name="TextBox 6"/>
-          <p:cNvSpPr txBox="1"/>
-          <p:nvPr/>
-        </p:nvSpPr>
-        <p:spPr>
-          <a:xfrm>
             <a:off x="11094415" y="6446520"/>
             <a:ext cx="548640" cy="274320"/>
           </a:xfrm>
@@ -7437,41 +7157,6 @@
         </p:nvSpPr>
         <p:spPr>
           <a:xfrm>
-            <a:off x="2194560" y="6446520"/>
-            <a:ext cx="5943600" cy="274320"/>
-          </a:xfrm>
-          <a:prstGeom prst="rect">
-            <a:avLst/>
-          </a:prstGeom>
-          <a:noFill/>
-        </p:spPr>
-        <p:txBody>
-          <a:bodyPr wrap="square" anchor="t" lIns="0" rIns="0" tIns="0" bIns="0">
-            <a:spAutoFit/>
-          </a:bodyPr>
-          <a:lstStyle/>
-          <a:p>
-            <a:pPr algn="l"/>
-            <a:r>
-              <a:rPr sz="1000" b="1" i="0">
-                <a:solidFill>
-                  <a:srgbClr val="8F989D"/>
-                </a:solidFill>
-                <a:latin typeface="Calibri"/>
-              </a:rPr>
-              <a:t>Inicio 5:10 pm</a:t>
-            </a:r>
-          </a:p>
-        </p:txBody>
-      </p:sp>
-      <p:sp>
-        <p:nvSpPr>
-          <p:cNvPr id="6" name="TextBox 5"/>
-          <p:cNvSpPr txBox="1"/>
-          <p:nvPr/>
-        </p:nvSpPr>
-        <p:spPr>
-          <a:xfrm>
             <a:off x="11094415" y="6446520"/>
             <a:ext cx="548640" cy="274320"/>
           </a:xfrm>
@@ -7501,7 +7186,7 @@
       </p:sp>
       <p:sp>
         <p:nvSpPr>
-          <p:cNvPr id="7" name="TextBox 6"/>
+          <p:cNvPr id="6" name="TextBox 5"/>
           <p:cNvSpPr txBox="1"/>
           <p:nvPr/>
         </p:nvSpPr>
@@ -7975,41 +7660,6 @@
         </p:nvSpPr>
         <p:spPr>
           <a:xfrm>
-            <a:off x="2194560" y="6446520"/>
-            <a:ext cx="5943600" cy="274320"/>
-          </a:xfrm>
-          <a:prstGeom prst="rect">
-            <a:avLst/>
-          </a:prstGeom>
-          <a:noFill/>
-        </p:spPr>
-        <p:txBody>
-          <a:bodyPr wrap="square" anchor="t" lIns="0" rIns="0" tIns="0" bIns="0">
-            <a:spAutoFit/>
-          </a:bodyPr>
-          <a:lstStyle/>
-          <a:p>
-            <a:pPr algn="l"/>
-            <a:r>
-              <a:rPr sz="1000" b="1" i="0">
-                <a:solidFill>
-                  <a:srgbClr val="8F989D"/>
-                </a:solidFill>
-                <a:latin typeface="Calibri"/>
-              </a:rPr>
-              <a:t>Inicio 5:10 pm</a:t>
-            </a:r>
-          </a:p>
-        </p:txBody>
-      </p:sp>
-      <p:sp>
-        <p:nvSpPr>
-          <p:cNvPr id="6" name="TextBox 5"/>
-          <p:cNvSpPr txBox="1"/>
-          <p:nvPr/>
-        </p:nvSpPr>
-        <p:spPr>
-          <a:xfrm>
             <a:off x="11094415" y="6446520"/>
             <a:ext cx="548640" cy="274320"/>
           </a:xfrm>
@@ -8524,41 +8174,6 @@
         </p:nvSpPr>
         <p:spPr>
           <a:xfrm>
-            <a:off x="2194560" y="6446520"/>
-            <a:ext cx="5943600" cy="274320"/>
-          </a:xfrm>
-          <a:prstGeom prst="rect">
-            <a:avLst/>
-          </a:prstGeom>
-          <a:noFill/>
-        </p:spPr>
-        <p:txBody>
-          <a:bodyPr wrap="square" anchor="t" lIns="0" rIns="0" tIns="0" bIns="0">
-            <a:spAutoFit/>
-          </a:bodyPr>
-          <a:lstStyle/>
-          <a:p>
-            <a:pPr algn="l"/>
-            <a:r>
-              <a:rPr sz="1000" b="1" i="0">
-                <a:solidFill>
-                  <a:srgbClr val="8F989D"/>
-                </a:solidFill>
-                <a:latin typeface="Calibri"/>
-              </a:rPr>
-              <a:t>Inicio 5:10 pm</a:t>
-            </a:r>
-          </a:p>
-        </p:txBody>
-      </p:sp>
-      <p:sp>
-        <p:nvSpPr>
-          <p:cNvPr id="6" name="TextBox 5"/>
-          <p:cNvSpPr txBox="1"/>
-          <p:nvPr/>
-        </p:nvSpPr>
-        <p:spPr>
-          <a:xfrm>
             <a:off x="11094415" y="6446520"/>
             <a:ext cx="548640" cy="274320"/>
           </a:xfrm>
@@ -8976,41 +8591,6 @@
         </p:nvSpPr>
         <p:spPr>
           <a:xfrm>
-            <a:off x="2194560" y="6446520"/>
-            <a:ext cx="5943600" cy="274320"/>
-          </a:xfrm>
-          <a:prstGeom prst="rect">
-            <a:avLst/>
-          </a:prstGeom>
-          <a:noFill/>
-        </p:spPr>
-        <p:txBody>
-          <a:bodyPr wrap="square" anchor="t" lIns="0" rIns="0" tIns="0" bIns="0">
-            <a:spAutoFit/>
-          </a:bodyPr>
-          <a:lstStyle/>
-          <a:p>
-            <a:pPr algn="l"/>
-            <a:r>
-              <a:rPr sz="1000" b="1" i="0">
-                <a:solidFill>
-                  <a:srgbClr val="8F989D"/>
-                </a:solidFill>
-                <a:latin typeface="Calibri"/>
-              </a:rPr>
-              <a:t>Inicio 5:10 pm</a:t>
-            </a:r>
-          </a:p>
-        </p:txBody>
-      </p:sp>
-      <p:sp>
-        <p:nvSpPr>
-          <p:cNvPr id="6" name="TextBox 5"/>
-          <p:cNvSpPr txBox="1"/>
-          <p:nvPr/>
-        </p:nvSpPr>
-        <p:spPr>
-          <a:xfrm>
             <a:off x="11094415" y="6446520"/>
             <a:ext cx="548640" cy="274320"/>
           </a:xfrm>
@@ -9244,41 +8824,6 @@
         </p:nvSpPr>
         <p:spPr>
           <a:xfrm>
-            <a:off x="2194560" y="6446520"/>
-            <a:ext cx="5943600" cy="274320"/>
-          </a:xfrm>
-          <a:prstGeom prst="rect">
-            <a:avLst/>
-          </a:prstGeom>
-          <a:noFill/>
-        </p:spPr>
-        <p:txBody>
-          <a:bodyPr wrap="square" anchor="t" lIns="0" rIns="0" tIns="0" bIns="0">
-            <a:spAutoFit/>
-          </a:bodyPr>
-          <a:lstStyle/>
-          <a:p>
-            <a:pPr algn="l"/>
-            <a:r>
-              <a:rPr sz="1000" b="1" i="0">
-                <a:solidFill>
-                  <a:srgbClr val="8F989D"/>
-                </a:solidFill>
-                <a:latin typeface="Calibri"/>
-              </a:rPr>
-              <a:t>Inicio 5:10 pm</a:t>
-            </a:r>
-          </a:p>
-        </p:txBody>
-      </p:sp>
-      <p:sp>
-        <p:nvSpPr>
-          <p:cNvPr id="6" name="TextBox 5"/>
-          <p:cNvSpPr txBox="1"/>
-          <p:nvPr/>
-        </p:nvSpPr>
-        <p:spPr>
-          <a:xfrm>
             <a:off x="11094415" y="6446520"/>
             <a:ext cx="548640" cy="274320"/>
           </a:xfrm>
@@ -9525,41 +9070,6 @@
           </a:p>
         </p:txBody>
       </p:sp>
-      <p:sp>
-        <p:nvSpPr>
-          <p:cNvPr id="7" name="TextBox 6"/>
-          <p:cNvSpPr txBox="1"/>
-          <p:nvPr/>
-        </p:nvSpPr>
-        <p:spPr>
-          <a:xfrm>
-            <a:off x="2194560" y="6446520"/>
-            <a:ext cx="5943600" cy="274320"/>
-          </a:xfrm>
-          <a:prstGeom prst="rect">
-            <a:avLst/>
-          </a:prstGeom>
-          <a:noFill/>
-        </p:spPr>
-        <p:txBody>
-          <a:bodyPr wrap="square" anchor="t" lIns="0" rIns="0" tIns="0" bIns="0">
-            <a:spAutoFit/>
-          </a:bodyPr>
-          <a:lstStyle/>
-          <a:p>
-            <a:pPr algn="l"/>
-            <a:r>
-              <a:rPr sz="1000" b="1" i="0">
-                <a:solidFill>
-                  <a:srgbClr val="8F989D"/>
-                </a:solidFill>
-                <a:latin typeface="Calibri"/>
-              </a:rPr>
-              <a:t>Inicio 5:10 pm</a:t>
-            </a:r>
-          </a:p>
-        </p:txBody>
-      </p:sp>
     </p:spTree>
   </p:cSld>
   <p:clrMapOvr>
@@ -10074,41 +9584,6 @@
         </p:nvSpPr>
         <p:spPr>
           <a:xfrm>
-            <a:off x="2194560" y="6446520"/>
-            <a:ext cx="5943600" cy="274320"/>
-          </a:xfrm>
-          <a:prstGeom prst="rect">
-            <a:avLst/>
-          </a:prstGeom>
-          <a:noFill/>
-        </p:spPr>
-        <p:txBody>
-          <a:bodyPr wrap="square" anchor="t" lIns="0" rIns="0" tIns="0" bIns="0">
-            <a:spAutoFit/>
-          </a:bodyPr>
-          <a:lstStyle/>
-          <a:p>
-            <a:pPr algn="l"/>
-            <a:r>
-              <a:rPr sz="1000" b="1" i="0">
-                <a:solidFill>
-                  <a:srgbClr val="8F989D"/>
-                </a:solidFill>
-                <a:latin typeface="Calibri"/>
-              </a:rPr>
-              <a:t>Inicio 5:10 pm</a:t>
-            </a:r>
-          </a:p>
-        </p:txBody>
-      </p:sp>
-      <p:sp>
-        <p:nvSpPr>
-          <p:cNvPr id="6" name="TextBox 5"/>
-          <p:cNvSpPr txBox="1"/>
-          <p:nvPr/>
-        </p:nvSpPr>
-        <p:spPr>
-          <a:xfrm>
             <a:off x="11094415" y="6446520"/>
             <a:ext cx="548640" cy="274320"/>
           </a:xfrm>
@@ -10560,41 +10035,6 @@
         </p:nvSpPr>
         <p:spPr>
           <a:xfrm>
-            <a:off x="2194560" y="6446520"/>
-            <a:ext cx="5943600" cy="274320"/>
-          </a:xfrm>
-          <a:prstGeom prst="rect">
-            <a:avLst/>
-          </a:prstGeom>
-          <a:noFill/>
-        </p:spPr>
-        <p:txBody>
-          <a:bodyPr wrap="square" anchor="t" lIns="0" rIns="0" tIns="0" bIns="0">
-            <a:spAutoFit/>
-          </a:bodyPr>
-          <a:lstStyle/>
-          <a:p>
-            <a:pPr algn="l"/>
-            <a:r>
-              <a:rPr sz="1000" b="1" i="0">
-                <a:solidFill>
-                  <a:srgbClr val="8F989D"/>
-                </a:solidFill>
-                <a:latin typeface="Calibri"/>
-              </a:rPr>
-              <a:t>Inicio 5:10 pm</a:t>
-            </a:r>
-          </a:p>
-        </p:txBody>
-      </p:sp>
-      <p:sp>
-        <p:nvSpPr>
-          <p:cNvPr id="6" name="TextBox 5"/>
-          <p:cNvSpPr txBox="1"/>
-          <p:nvPr/>
-        </p:nvSpPr>
-        <p:spPr>
-          <a:xfrm>
             <a:off x="11094415" y="6446520"/>
             <a:ext cx="548640" cy="274320"/>
           </a:xfrm>
@@ -10624,7 +10064,7 @@
       </p:sp>
       <p:sp>
         <p:nvSpPr>
-          <p:cNvPr id="7" name="TextBox 6"/>
+          <p:cNvPr id="6" name="TextBox 5"/>
           <p:cNvSpPr txBox="1"/>
           <p:nvPr/>
         </p:nvSpPr>
@@ -11131,41 +10571,6 @@
       <p:sp>
         <p:nvSpPr>
           <p:cNvPr id="5" name="TextBox 4"/>
-          <p:cNvSpPr txBox="1"/>
-          <p:nvPr/>
-        </p:nvSpPr>
-        <p:spPr>
-          <a:xfrm>
-            <a:off x="2194560" y="6446520"/>
-            <a:ext cx="5943600" cy="274320"/>
-          </a:xfrm>
-          <a:prstGeom prst="rect">
-            <a:avLst/>
-          </a:prstGeom>
-          <a:noFill/>
-        </p:spPr>
-        <p:txBody>
-          <a:bodyPr wrap="square" anchor="t" lIns="0" rIns="0" tIns="0" bIns="0">
-            <a:spAutoFit/>
-          </a:bodyPr>
-          <a:lstStyle/>
-          <a:p>
-            <a:pPr algn="l"/>
-            <a:r>
-              <a:rPr sz="1000" b="1" i="0">
-                <a:solidFill>
-                  <a:srgbClr val="8F989D"/>
-                </a:solidFill>
-                <a:latin typeface="Calibri"/>
-              </a:rPr>
-              <a:t>Inicio 5:10 pm</a:t>
-            </a:r>
-          </a:p>
-        </p:txBody>
-      </p:sp>
-      <p:sp>
-        <p:nvSpPr>
-          <p:cNvPr id="6" name="TextBox 5"/>
           <p:cNvSpPr txBox="1"/>
           <p:nvPr/>
         </p:nvSpPr>
@@ -12000,41 +11405,6 @@
         </p:nvSpPr>
         <p:spPr>
           <a:xfrm>
-            <a:off x="2194560" y="6446520"/>
-            <a:ext cx="5943600" cy="274320"/>
-          </a:xfrm>
-          <a:prstGeom prst="rect">
-            <a:avLst/>
-          </a:prstGeom>
-          <a:noFill/>
-        </p:spPr>
-        <p:txBody>
-          <a:bodyPr wrap="square" anchor="t" lIns="0" rIns="0" tIns="0" bIns="0">
-            <a:spAutoFit/>
-          </a:bodyPr>
-          <a:lstStyle/>
-          <a:p>
-            <a:pPr algn="l"/>
-            <a:r>
-              <a:rPr sz="1000" b="1" i="0">
-                <a:solidFill>
-                  <a:srgbClr val="8F989D"/>
-                </a:solidFill>
-                <a:latin typeface="Calibri"/>
-              </a:rPr>
-              <a:t>Inicio 5:10 pm</a:t>
-            </a:r>
-          </a:p>
-        </p:txBody>
-      </p:sp>
-      <p:sp>
-        <p:nvSpPr>
-          <p:cNvPr id="7" name="TextBox 6"/>
-          <p:cNvSpPr txBox="1"/>
-          <p:nvPr/>
-        </p:nvSpPr>
-        <p:spPr>
-          <a:xfrm>
             <a:off x="11094415" y="6446520"/>
             <a:ext cx="548640" cy="274320"/>
           </a:xfrm>
@@ -12787,41 +12157,6 @@
         </p:nvSpPr>
         <p:spPr>
           <a:xfrm>
-            <a:off x="2194560" y="6446520"/>
-            <a:ext cx="5943600" cy="274320"/>
-          </a:xfrm>
-          <a:prstGeom prst="rect">
-            <a:avLst/>
-          </a:prstGeom>
-          <a:noFill/>
-        </p:spPr>
-        <p:txBody>
-          <a:bodyPr wrap="square" anchor="t" lIns="0" rIns="0" tIns="0" bIns="0">
-            <a:spAutoFit/>
-          </a:bodyPr>
-          <a:lstStyle/>
-          <a:p>
-            <a:pPr algn="l"/>
-            <a:r>
-              <a:rPr sz="1000" b="1" i="0">
-                <a:solidFill>
-                  <a:srgbClr val="8F989D"/>
-                </a:solidFill>
-                <a:latin typeface="Calibri"/>
-              </a:rPr>
-              <a:t>Inicio 5:10 pm</a:t>
-            </a:r>
-          </a:p>
-        </p:txBody>
-      </p:sp>
-      <p:sp>
-        <p:nvSpPr>
-          <p:cNvPr id="7" name="TextBox 6"/>
-          <p:cNvSpPr txBox="1"/>
-          <p:nvPr/>
-        </p:nvSpPr>
-        <p:spPr>
-          <a:xfrm>
             <a:off x="11094415" y="6446520"/>
             <a:ext cx="548640" cy="274320"/>
           </a:xfrm>
@@ -13408,41 +12743,6 @@
         </p:nvSpPr>
         <p:spPr>
           <a:xfrm>
-            <a:off x="2194560" y="6446520"/>
-            <a:ext cx="5943600" cy="274320"/>
-          </a:xfrm>
-          <a:prstGeom prst="rect">
-            <a:avLst/>
-          </a:prstGeom>
-          <a:noFill/>
-        </p:spPr>
-        <p:txBody>
-          <a:bodyPr wrap="square" anchor="t" lIns="0" rIns="0" tIns="0" bIns="0">
-            <a:spAutoFit/>
-          </a:bodyPr>
-          <a:lstStyle/>
-          <a:p>
-            <a:pPr algn="l"/>
-            <a:r>
-              <a:rPr sz="1000" b="1" i="0">
-                <a:solidFill>
-                  <a:srgbClr val="8F989D"/>
-                </a:solidFill>
-                <a:latin typeface="Calibri"/>
-              </a:rPr>
-              <a:t>Inicio 5:10 pm</a:t>
-            </a:r>
-          </a:p>
-        </p:txBody>
-      </p:sp>
-      <p:sp>
-        <p:nvSpPr>
-          <p:cNvPr id="6" name="TextBox 5"/>
-          <p:cNvSpPr txBox="1"/>
-          <p:nvPr/>
-        </p:nvSpPr>
-        <p:spPr>
-          <a:xfrm>
             <a:off x="11094415" y="6446520"/>
             <a:ext cx="548640" cy="274320"/>
           </a:xfrm>
@@ -13880,41 +13180,6 @@
       <p:sp>
         <p:nvSpPr>
           <p:cNvPr id="5" name="TextBox 4"/>
-          <p:cNvSpPr txBox="1"/>
-          <p:nvPr/>
-        </p:nvSpPr>
-        <p:spPr>
-          <a:xfrm>
-            <a:off x="2194560" y="6446520"/>
-            <a:ext cx="5943600" cy="274320"/>
-          </a:xfrm>
-          <a:prstGeom prst="rect">
-            <a:avLst/>
-          </a:prstGeom>
-          <a:noFill/>
-        </p:spPr>
-        <p:txBody>
-          <a:bodyPr wrap="square" anchor="t" lIns="0" rIns="0" tIns="0" bIns="0">
-            <a:spAutoFit/>
-          </a:bodyPr>
-          <a:lstStyle/>
-          <a:p>
-            <a:pPr algn="l"/>
-            <a:r>
-              <a:rPr sz="1000" b="1" i="0">
-                <a:solidFill>
-                  <a:srgbClr val="8F989D"/>
-                </a:solidFill>
-                <a:latin typeface="Calibri"/>
-              </a:rPr>
-              <a:t>Inicio 5:10 pm</a:t>
-            </a:r>
-          </a:p>
-        </p:txBody>
-      </p:sp>
-      <p:sp>
-        <p:nvSpPr>
-          <p:cNvPr id="6" name="TextBox 5"/>
           <p:cNvSpPr txBox="1"/>
           <p:nvPr/>
         </p:nvSpPr>

--- a/Pregrado/Creatividad y pensamiento innovador/Clases/Sesion 03 - Gestión de la innovación (Manual de Oslo OCDE)/Presentacion.pptx
+++ b/Pregrado/Creatividad y pensamiento innovador/Clases/Sesion 03 - Gestión de la innovación (Manual de Oslo OCDE)/Presentacion.pptx
@@ -7604,7 +7604,7 @@
                 </a:solidFill>
                 <a:latin typeface="Calibri"/>
               </a:rPr>
-              <a:t>`S04_FichaOslo_Apellido`</a:t>
+              <a:t>`S03_FichaOslo_Apellido`</a:t>
             </a:r>
             <a:r>
               <a:rPr sz="1600" b="0" i="0">
@@ -7998,7 +7998,7 @@
                 </a:solidFill>
                 <a:latin typeface="Calibri"/>
               </a:rPr>
-              <a:t>`S04_FichaOslo_Apellido`</a:t>
+              <a:t>`S03_FichaOslo_Apellido`</a:t>
             </a:r>
             <a:r>
               <a:rPr sz="1600" b="0" i="0">

--- a/Pregrado/Creatividad y pensamiento innovador/Clases/Sesion 03 - Gestión de la innovación (Manual de Oslo OCDE)/Presentacion.pptx
+++ b/Pregrado/Creatividad y pensamiento innovador/Clases/Sesion 03 - Gestión de la innovación (Manual de Oslo OCDE)/Presentacion.pptx
@@ -26,6 +26,8 @@
     <p:sldId id="274" r:id="rId25"/>
     <p:sldId id="275" r:id="rId26"/>
     <p:sldId id="276" r:id="rId27"/>
+    <p:sldId id="277" r:id="rId28"/>
+    <p:sldId id="278" r:id="rId29"/>
   </p:sldIdLst>
   <p:sldSz cx="12191695" cy="6858000" type="screen4x3"/>
   <p:notesSz cx="6858000" cy="9144000"/>
@@ -6669,7 +6671,7 @@
                 </a:solidFill>
                 <a:latin typeface="Calibri"/>
               </a:rPr>
-              <a:t>TALLER — Ficha Oslo de su propuesta (20 minutos)</a:t>
+              <a:t>TALLER · Ficha Oslo de su propuesta</a:t>
             </a:r>
           </a:p>
         </p:txBody>
@@ -6682,8 +6684,8 @@
         </p:nvSpPr>
         <p:spPr>
           <a:xfrm>
-            <a:off x="640080" y="1691639"/>
-            <a:ext cx="10911535" cy="4617720"/>
+            <a:off x="640080" y="1280160"/>
+            <a:ext cx="10911535" cy="411480"/>
           </a:xfrm>
           <a:prstGeom prst="rect">
             <a:avLst/>
@@ -6696,6 +6698,41 @@
           </a:bodyPr>
           <a:lstStyle/>
           <a:p>
+            <a:pPr algn="ctr"/>
+            <a:r>
+              <a:rPr sz="1500" b="0" i="0">
+                <a:solidFill>
+                  <a:srgbClr val="2B2B2B"/>
+                </a:solidFill>
+                <a:latin typeface="Calibri"/>
+              </a:rPr>
+              <a:t>Individual · el Docente lee tres fichas en voz alta al cerrar</a:t>
+            </a:r>
+          </a:p>
+        </p:txBody>
+      </p:sp>
+      <p:sp>
+        <p:nvSpPr>
+          <p:cNvPr id="5" name="TextBox 4"/>
+          <p:cNvSpPr txBox="1"/>
+          <p:nvPr/>
+        </p:nvSpPr>
+        <p:spPr>
+          <a:xfrm>
+            <a:off x="640080" y="2011679"/>
+            <a:ext cx="10911535" cy="4297680"/>
+          </a:xfrm>
+          <a:prstGeom prst="rect">
+            <a:avLst/>
+          </a:prstGeom>
+          <a:noFill/>
+        </p:spPr>
+        <p:txBody>
+          <a:bodyPr wrap="square" anchor="t" lIns="0" rIns="0" tIns="0" bIns="0">
+            <a:spAutoFit/>
+          </a:bodyPr>
+          <a:lstStyle/>
+          <a:p>
             <a:pPr>
               <a:spcAft>
                 <a:spcPts val="1000"/>
@@ -6708,7 +6745,7 @@
                 </a:solidFill>
                 <a:latin typeface="Calibri"/>
               </a:rPr>
-              <a:t>–   Completen la </a:t>
+              <a:t>–   </a:t>
             </a:r>
             <a:r>
               <a:rPr sz="1600" b="1" i="0">
@@ -6717,158 +6754,16 @@
                 </a:solidFill>
                 <a:latin typeface="Calibri"/>
               </a:rPr>
-              <a:t>Ficha Oslo</a:t>
-            </a:r>
-            <a:r>
-              <a:rPr sz="1600" b="0" i="0">
-                <a:solidFill>
-                  <a:srgbClr val="2B2B2B"/>
-                </a:solidFill>
-                <a:latin typeface="Calibri"/>
-              </a:rPr>
-              <a:t> de su propuesta en Google Docs o Excalidraw, con los </a:t>
-            </a:r>
-            <a:r>
-              <a:rPr sz="1600" b="1" i="0">
-                <a:solidFill>
-                  <a:srgbClr val="2B2B2B"/>
-                </a:solidFill>
-                <a:latin typeface="Calibri"/>
-              </a:rPr>
-              <a:t>seis campos</a:t>
-            </a:r>
-            <a:r>
-              <a:rPr sz="1600" b="0" i="0">
-                <a:solidFill>
-                  <a:srgbClr val="2B2B2B"/>
-                </a:solidFill>
-                <a:latin typeface="Calibri"/>
-              </a:rPr>
-              <a:t>:</a:t>
-            </a:r>
-          </a:p>
-          <a:p>
-            <a:pPr lvl="1">
-              <a:spcAft>
-                <a:spcPts val="600"/>
-              </a:spcAft>
-            </a:pPr>
-            <a:r>
-              <a:rPr sz="1500" b="0" i="0">
-                <a:solidFill>
-                  <a:srgbClr val="2B2B2B"/>
-                </a:solidFill>
-                <a:latin typeface="Calibri"/>
-              </a:rPr>
-              <a:t>●   (1) </a:t>
-            </a:r>
-            <a:r>
-              <a:rPr sz="1500" b="1" i="0">
-                <a:solidFill>
-                  <a:srgbClr val="2B2B2B"/>
-                </a:solidFill>
-                <a:latin typeface="Calibri"/>
-              </a:rPr>
-              <a:t>tipo dominante</a:t>
-            </a:r>
-            <a:r>
-              <a:rPr sz="1500" b="0" i="0">
-                <a:solidFill>
-                  <a:srgbClr val="2B2B2B"/>
-                </a:solidFill>
-                <a:latin typeface="Calibri"/>
-              </a:rPr>
-              <a:t> · (2) tipo </a:t>
-            </a:r>
-            <a:r>
-              <a:rPr sz="1500" b="1" i="0">
-                <a:solidFill>
-                  <a:srgbClr val="2B2B2B"/>
-                </a:solidFill>
-                <a:latin typeface="Calibri"/>
-              </a:rPr>
-              <a:t>secundario</a:t>
-            </a:r>
-            <a:r>
-              <a:rPr sz="1500" b="0" i="0">
-                <a:solidFill>
-                  <a:srgbClr val="2B2B2B"/>
-                </a:solidFill>
-                <a:latin typeface="Calibri"/>
-              </a:rPr>
-              <a:t> opcional · (3) </a:t>
-            </a:r>
-            <a:r>
-              <a:rPr sz="1500" b="1" i="0">
-                <a:solidFill>
-                  <a:srgbClr val="2B2B2B"/>
-                </a:solidFill>
-                <a:latin typeface="Calibri"/>
-              </a:rPr>
-              <a:t>novedad</a:t>
-            </a:r>
-            <a:r>
-              <a:rPr sz="1500" b="0" i="0">
-                <a:solidFill>
-                  <a:srgbClr val="2B2B2B"/>
-                </a:solidFill>
-                <a:latin typeface="Calibri"/>
-              </a:rPr>
-              <a:t> — ¿nueva para quién? · (4) </a:t>
-            </a:r>
-            <a:r>
-              <a:rPr sz="1500" b="1" i="0">
-                <a:solidFill>
-                  <a:srgbClr val="2B2B2B"/>
-                </a:solidFill>
-                <a:latin typeface="Calibri"/>
-              </a:rPr>
-              <a:t>valor esperado</a:t>
-            </a:r>
-            <a:r>
-              <a:rPr sz="1500" b="0" i="0">
-                <a:solidFill>
-                  <a:srgbClr val="2B2B2B"/>
-                </a:solidFill>
-                <a:latin typeface="Calibri"/>
-              </a:rPr>
-              <a:t> en una frase · (5) </a:t>
-            </a:r>
-            <a:r>
-              <a:rPr sz="1500" b="1" i="0">
-                <a:solidFill>
-                  <a:srgbClr val="2B2B2B"/>
-                </a:solidFill>
-                <a:latin typeface="Calibri"/>
-              </a:rPr>
-              <a:t>dos actividades de gestión</a:t>
-            </a:r>
-            <a:r>
-              <a:rPr sz="1500" b="0" i="0">
-                <a:solidFill>
-                  <a:srgbClr val="2B2B2B"/>
-                </a:solidFill>
-                <a:latin typeface="Calibri"/>
-              </a:rPr>
-              <a:t> con responsable y fecha · (6) </a:t>
-            </a:r>
-            <a:r>
-              <a:rPr sz="1500" b="1" i="0">
-                <a:solidFill>
-                  <a:srgbClr val="2B2B2B"/>
-                </a:solidFill>
-                <a:latin typeface="Calibri"/>
-              </a:rPr>
-              <a:t>riesgo #1</a:t>
-            </a:r>
-            <a:r>
-              <a:rPr sz="1500" b="0" i="0">
-                <a:solidFill>
-                  <a:srgbClr val="2B2B2B"/>
-                </a:solidFill>
-                <a:latin typeface="Calibri"/>
-              </a:rPr>
-              <a:t>.</a:t>
+              <a:t>Al final tiene:</a:t>
+            </a:r>
+            <a:r>
+              <a:rPr sz="1600" b="0" i="0">
+                <a:solidFill>
+                  <a:srgbClr val="2B2B2B"/>
+                </a:solidFill>
+                <a:latin typeface="Calibri"/>
+              </a:rPr>
+              <a:t> la Ficha Oslo de su propuesta con los seis campos llenos.</a:t>
             </a:r>
           </a:p>
           <a:p>
@@ -6893,16 +6788,52 @@
                 </a:solidFill>
                 <a:latin typeface="Calibri"/>
               </a:rPr>
-              <a:t>Minutos 0–6</a:t>
-            </a:r>
-            <a:r>
-              <a:rPr sz="1600" b="0" i="0">
-                <a:solidFill>
-                  <a:srgbClr val="2B2B2B"/>
-                </a:solidFill>
-                <a:latin typeface="Calibri"/>
-              </a:rPr>
-              <a:t> · Decidan el tipo dominante y escriban la justificación con "porque lo que cambia es...".</a:t>
+              <a:t>Paso 1</a:t>
+            </a:r>
+            <a:r>
+              <a:rPr sz="1600" b="0" i="0">
+                <a:solidFill>
+                  <a:srgbClr val="2B2B2B"/>
+                </a:solidFill>
+                <a:latin typeface="Calibri"/>
+              </a:rPr>
+              <a:t> · Abra la </a:t>
+            </a:r>
+            <a:r>
+              <a:rPr sz="1600" b="1" i="0">
+                <a:solidFill>
+                  <a:srgbClr val="2B2B2B"/>
+                </a:solidFill>
+                <a:latin typeface="Calibri"/>
+              </a:rPr>
+              <a:t>Ficha Oslo</a:t>
+            </a:r>
+            <a:r>
+              <a:rPr sz="1600" b="0" i="0">
+                <a:solidFill>
+                  <a:srgbClr val="2B2B2B"/>
+                </a:solidFill>
+                <a:latin typeface="Calibri"/>
+              </a:rPr>
+              <a:t> en Google Docs o Excalidraw, con sus </a:t>
+            </a:r>
+            <a:r>
+              <a:rPr sz="1600" b="1" i="0">
+                <a:solidFill>
+                  <a:srgbClr val="2B2B2B"/>
+                </a:solidFill>
+                <a:latin typeface="Calibri"/>
+              </a:rPr>
+              <a:t>seis campos</a:t>
+            </a:r>
+            <a:r>
+              <a:rPr sz="1600" b="0" i="0">
+                <a:solidFill>
+                  <a:srgbClr val="2B2B2B"/>
+                </a:solidFill>
+                <a:latin typeface="Calibri"/>
+              </a:rPr>
+              <a:t>.</a:t>
             </a:r>
           </a:p>
           <a:p>
@@ -6927,16 +6858,16 @@
                 </a:solidFill>
                 <a:latin typeface="Calibri"/>
               </a:rPr>
-              <a:t>Minutos 6–12</a:t>
-            </a:r>
-            <a:r>
-              <a:rPr sz="1600" b="0" i="0">
-                <a:solidFill>
-                  <a:srgbClr val="2B2B2B"/>
-                </a:solidFill>
-                <a:latin typeface="Calibri"/>
-              </a:rPr>
-              <a:t> · Novedad y valor. Escriban el valor </a:t>
+              <a:t>Paso 2</a:t>
+            </a:r>
+            <a:r>
+              <a:rPr sz="1600" b="0" i="0">
+                <a:solidFill>
+                  <a:srgbClr val="2B2B2B"/>
+                </a:solidFill>
+                <a:latin typeface="Calibri"/>
+              </a:rPr>
+              <a:t> · Decida el </a:t>
             </a:r>
             <a:r>
               <a:rPr sz="1600" b="1" i="0">
@@ -6945,16 +6876,16 @@
                 </a:solidFill>
                 <a:latin typeface="Calibri"/>
               </a:rPr>
-              <a:t>desde el usuario</a:t>
-            </a:r>
-            <a:r>
-              <a:rPr sz="1600" b="0" i="0">
-                <a:solidFill>
-                  <a:srgbClr val="2B2B2B"/>
-                </a:solidFill>
-                <a:latin typeface="Calibri"/>
-              </a:rPr>
-              <a:t>, no desde la técnica.</a:t>
+              <a:t>tipo dominante</a:t>
+            </a:r>
+            <a:r>
+              <a:rPr sz="1600" b="0" i="0">
+                <a:solidFill>
+                  <a:srgbClr val="2B2B2B"/>
+                </a:solidFill>
+                <a:latin typeface="Calibri"/>
+              </a:rPr>
+              <a:t> y escriba la justificación empezando por «porque lo que cambia es…».</a:t>
             </a:r>
           </a:p>
           <a:p>
@@ -6979,16 +6910,70 @@
                 </a:solidFill>
                 <a:latin typeface="Calibri"/>
               </a:rPr>
-              <a:t>Minutos 12–18</a:t>
-            </a:r>
-            <a:r>
-              <a:rPr sz="1600" b="0" i="0">
-                <a:solidFill>
-                  <a:srgbClr val="2B2B2B"/>
-                </a:solidFill>
-                <a:latin typeface="Calibri"/>
-              </a:rPr>
-              <a:t> · Las dos actividades, con nombre y fecha, y el riesgo #1.</a:t>
+              <a:t>Paso 3</a:t>
+            </a:r>
+            <a:r>
+              <a:rPr sz="1600" b="0" i="0">
+                <a:solidFill>
+                  <a:srgbClr val="2B2B2B"/>
+                </a:solidFill>
+                <a:latin typeface="Calibri"/>
+              </a:rPr>
+              <a:t> · Escriba la </a:t>
+            </a:r>
+            <a:r>
+              <a:rPr sz="1600" b="1" i="0">
+                <a:solidFill>
+                  <a:srgbClr val="2B2B2B"/>
+                </a:solidFill>
+                <a:latin typeface="Calibri"/>
+              </a:rPr>
+              <a:t>novedad</a:t>
+            </a:r>
+            <a:r>
+              <a:rPr sz="1600" b="0" i="0">
+                <a:solidFill>
+                  <a:srgbClr val="2B2B2B"/>
+                </a:solidFill>
+                <a:latin typeface="Calibri"/>
+              </a:rPr>
+              <a:t> —¿nueva para quién?— y el </a:t>
+            </a:r>
+            <a:r>
+              <a:rPr sz="1600" b="1" i="0">
+                <a:solidFill>
+                  <a:srgbClr val="2B2B2B"/>
+                </a:solidFill>
+                <a:latin typeface="Calibri"/>
+              </a:rPr>
+              <a:t>valor esperado</a:t>
+            </a:r>
+            <a:r>
+              <a:rPr sz="1600" b="0" i="0">
+                <a:solidFill>
+                  <a:srgbClr val="2B2B2B"/>
+                </a:solidFill>
+                <a:latin typeface="Calibri"/>
+              </a:rPr>
+              <a:t> en una frase, </a:t>
+            </a:r>
+            <a:r>
+              <a:rPr sz="1600" b="1" i="0">
+                <a:solidFill>
+                  <a:srgbClr val="2B2B2B"/>
+                </a:solidFill>
+                <a:latin typeface="Calibri"/>
+              </a:rPr>
+              <a:t>desde el usuario</a:t>
+            </a:r>
+            <a:r>
+              <a:rPr sz="1600" b="0" i="0">
+                <a:solidFill>
+                  <a:srgbClr val="2B2B2B"/>
+                </a:solidFill>
+                <a:latin typeface="Calibri"/>
+              </a:rPr>
+              <a:t>, no desde la técnica.</a:t>
             </a:r>
           </a:p>
           <a:p>
@@ -7013,16 +6998,70 @@
                 </a:solidFill>
                 <a:latin typeface="Calibri"/>
               </a:rPr>
-              <a:t>Minutos 18–20</a:t>
-            </a:r>
-            <a:r>
-              <a:rPr sz="1600" b="0" i="0">
-                <a:solidFill>
-                  <a:srgbClr val="2B2B2B"/>
-                </a:solidFill>
-                <a:latin typeface="Calibri"/>
-              </a:rPr>
-              <a:t> · Relean y borren toda frase que sirva para cualquier proyecto.</a:t>
+              <a:t>Paso 4</a:t>
+            </a:r>
+            <a:r>
+              <a:rPr sz="1600" b="0" i="0">
+                <a:solidFill>
+                  <a:srgbClr val="2B2B2B"/>
+                </a:solidFill>
+                <a:latin typeface="Calibri"/>
+              </a:rPr>
+              <a:t> · Añada el </a:t>
+            </a:r>
+            <a:r>
+              <a:rPr sz="1600" b="1" i="0">
+                <a:solidFill>
+                  <a:srgbClr val="2B2B2B"/>
+                </a:solidFill>
+                <a:latin typeface="Calibri"/>
+              </a:rPr>
+              <a:t>tipo secundario</a:t>
+            </a:r>
+            <a:r>
+              <a:rPr sz="1600" b="0" i="0">
+                <a:solidFill>
+                  <a:srgbClr val="2B2B2B"/>
+                </a:solidFill>
+                <a:latin typeface="Calibri"/>
+              </a:rPr>
+              <a:t> si lo hay, las </a:t>
+            </a:r>
+            <a:r>
+              <a:rPr sz="1600" b="1" i="0">
+                <a:solidFill>
+                  <a:srgbClr val="2B2B2B"/>
+                </a:solidFill>
+                <a:latin typeface="Calibri"/>
+              </a:rPr>
+              <a:t>dos actividades de gestión</a:t>
+            </a:r>
+            <a:r>
+              <a:rPr sz="1600" b="0" i="0">
+                <a:solidFill>
+                  <a:srgbClr val="2B2B2B"/>
+                </a:solidFill>
+                <a:latin typeface="Calibri"/>
+              </a:rPr>
+              <a:t> con responsable y fecha, y el </a:t>
+            </a:r>
+            <a:r>
+              <a:rPr sz="1600" b="1" i="0">
+                <a:solidFill>
+                  <a:srgbClr val="2B2B2B"/>
+                </a:solidFill>
+                <a:latin typeface="Calibri"/>
+              </a:rPr>
+              <a:t>riesgo #1</a:t>
+            </a:r>
+            <a:r>
+              <a:rPr sz="1600" b="0" i="0">
+                <a:solidFill>
+                  <a:srgbClr val="2B2B2B"/>
+                </a:solidFill>
+                <a:latin typeface="Calibri"/>
+              </a:rPr>
+              <a:t>.</a:t>
             </a:r>
           </a:p>
           <a:p>
@@ -7038,7 +7077,7 @@
                 </a:solidFill>
                 <a:latin typeface="Calibri"/>
               </a:rPr>
-              <a:t>–   Al final leo </a:t>
+              <a:t>–   </a:t>
             </a:r>
             <a:r>
               <a:rPr sz="1600" b="1" i="0">
@@ -7047,16 +7086,16 @@
                 </a:solidFill>
                 <a:latin typeface="Calibri"/>
               </a:rPr>
-              <a:t>tres fichas</a:t>
-            </a:r>
-            <a:r>
-              <a:rPr sz="1600" b="0" i="0">
-                <a:solidFill>
-                  <a:srgbClr val="2B2B2B"/>
-                </a:solidFill>
-                <a:latin typeface="Calibri"/>
-              </a:rPr>
-              <a:t> en voz alta y corregimos juntos las clasificaciones dudosas.</a:t>
+              <a:t>Paso 5</a:t>
+            </a:r>
+            <a:r>
+              <a:rPr sz="1600" b="0" i="0">
+                <a:solidFill>
+                  <a:srgbClr val="2B2B2B"/>
+                </a:solidFill>
+                <a:latin typeface="Calibri"/>
+              </a:rPr>
+              <a:t> · Relea y borre toda frase que sirva para cualquier proyecto.</a:t>
             </a:r>
           </a:p>
           <a:p>
@@ -7081,16 +7120,16 @@
                 </a:solidFill>
                 <a:latin typeface="Calibri"/>
               </a:rPr>
-              <a:t>Criterio de éxito verificable:</a:t>
-            </a:r>
-            <a:r>
-              <a:rPr sz="1600" b="0" i="0">
-                <a:solidFill>
-                  <a:srgbClr val="2B2B2B"/>
-                </a:solidFill>
-                <a:latin typeface="Calibri"/>
-              </a:rPr>
-              <a:t> el tipo dominante está </a:t>
+              <a:t>En clase, sin falta:</a:t>
+            </a:r>
+            <a:r>
+              <a:rPr sz="1600" b="0" i="0">
+                <a:solidFill>
+                  <a:srgbClr val="2B2B2B"/>
+                </a:solidFill>
+                <a:latin typeface="Calibri"/>
+              </a:rPr>
+              <a:t> los </a:t>
             </a:r>
             <a:r>
               <a:rPr sz="1600" b="1" i="0">
@@ -7099,59 +7138,23 @@
                 </a:solidFill>
                 <a:latin typeface="Calibri"/>
               </a:rPr>
-              <a:t>justificado</a:t>
-            </a:r>
-            <a:r>
-              <a:rPr sz="1600" b="0" i="0">
-                <a:solidFill>
-                  <a:srgbClr val="2B2B2B"/>
-                </a:solidFill>
-                <a:latin typeface="Calibri"/>
-              </a:rPr>
-              <a:t> con una razón (no solo nombrado) </a:t>
-            </a:r>
-            <a:r>
-              <a:rPr sz="1600" b="1" i="0">
-                <a:solidFill>
-                  <a:srgbClr val="2B2B2B"/>
-                </a:solidFill>
-                <a:latin typeface="Calibri"/>
-              </a:rPr>
-              <a:t>y</a:t>
-            </a:r>
-            <a:r>
-              <a:rPr sz="1600" b="0" i="0">
-                <a:solidFill>
-                  <a:srgbClr val="2B2B2B"/>
-                </a:solidFill>
-                <a:latin typeface="Calibri"/>
-              </a:rPr>
-              <a:t> las dos actividades tienen </a:t>
-            </a:r>
-            <a:r>
-              <a:rPr sz="1600" b="1" i="0">
-                <a:solidFill>
-                  <a:srgbClr val="2B2B2B"/>
-                </a:solidFill>
-                <a:latin typeface="Calibri"/>
-              </a:rPr>
-              <a:t>fecha real</a:t>
-            </a:r>
-            <a:r>
-              <a:rPr sz="1600" b="0" i="0">
-                <a:solidFill>
-                  <a:srgbClr val="2B2B2B"/>
-                </a:solidFill>
-                <a:latin typeface="Calibri"/>
-              </a:rPr>
-              <a:t>.</a:t>
-            </a:r>
-          </a:p>
-        </p:txBody>
-      </p:sp>
-      <p:sp>
-        <p:nvSpPr>
-          <p:cNvPr id="5" name="TextBox 4"/>
+              <a:t>pasos 1 a 3</a:t>
+            </a:r>
+            <a:r>
+              <a:rPr sz="1600" b="0" i="0">
+                <a:solidFill>
+                  <a:srgbClr val="2B2B2B"/>
+                </a:solidFill>
+                <a:latin typeface="Calibri"/>
+              </a:rPr>
+              <a:t>. Del 4 en adelante puede quedar en trabajo autónomo, pero antes de la próxima sesión.</a:t>
+            </a:r>
+          </a:p>
+        </p:txBody>
+      </p:sp>
+      <p:sp>
+        <p:nvSpPr>
+          <p:cNvPr id="6" name="TextBox 5"/>
           <p:cNvSpPr txBox="1"/>
           <p:nvPr/>
         </p:nvSpPr>
@@ -7180,40 +7183,6 @@
                 <a:latin typeface="Calibri"/>
               </a:rPr>
               <a:t>17</a:t>
-            </a:r>
-          </a:p>
-        </p:txBody>
-      </p:sp>
-      <p:sp>
-        <p:nvSpPr>
-          <p:cNvPr id="6" name="TextBox 5"/>
-          <p:cNvSpPr txBox="1"/>
-          <p:nvPr/>
-        </p:nvSpPr>
-        <p:spPr>
-          <a:xfrm>
-            <a:off x="640080" y="5943600"/>
-            <a:ext cx="9997135" cy="457200"/>
-          </a:xfrm>
-          <a:prstGeom prst="rect">
-            <a:avLst/>
-          </a:prstGeom>
-          <a:noFill/>
-        </p:spPr>
-        <p:txBody>
-          <a:bodyPr wrap="square" anchor="t" lIns="0" rIns="0" tIns="0" bIns="0">
-            <a:spAutoFit/>
-          </a:bodyPr>
-          <a:lstStyle/>
-          <a:p>
-            <a:r>
-              <a:rPr sz="1200" b="0" i="1">
-                <a:solidFill>
-                  <a:srgbClr val="2B2B2B"/>
-                </a:solidFill>
-                <a:latin typeface="Calibri"/>
-              </a:rPr>
-              <a:t>Si duda entre dos tipos, use la tabla de desempate: ¿función nueva, o menos tiempo/error?</a:t>
             </a:r>
           </a:p>
         </p:txBody>
@@ -7318,7 +7287,7 @@
                 </a:solidFill>
                 <a:latin typeface="Calibri"/>
               </a:rPr>
-              <a:t>Antes de entregar: revise usted mismo</a:t>
+              <a:t>TALLER · cómo se revisa y dónde se entrega</a:t>
             </a:r>
           </a:p>
         </p:txBody>
@@ -7331,8 +7300,8 @@
         </p:nvSpPr>
         <p:spPr>
           <a:xfrm>
-            <a:off x="640080" y="1691639"/>
-            <a:ext cx="10911535" cy="4617720"/>
+            <a:off x="640080" y="1280160"/>
+            <a:ext cx="10911535" cy="411480"/>
           </a:xfrm>
           <a:prstGeom prst="rect">
             <a:avLst/>
@@ -7345,6 +7314,41 @@
           </a:bodyPr>
           <a:lstStyle/>
           <a:p>
+            <a:pPr algn="ctr"/>
+            <a:r>
+              <a:rPr sz="1500" b="0" i="0">
+                <a:solidFill>
+                  <a:srgbClr val="2B2B2B"/>
+                </a:solidFill>
+                <a:latin typeface="Calibri"/>
+              </a:rPr>
+              <a:t>Ficha Oslo de su propuesta</a:t>
+            </a:r>
+          </a:p>
+        </p:txBody>
+      </p:sp>
+      <p:sp>
+        <p:nvSpPr>
+          <p:cNvPr id="5" name="TextBox 4"/>
+          <p:cNvSpPr txBox="1"/>
+          <p:nvPr/>
+        </p:nvSpPr>
+        <p:spPr>
+          <a:xfrm>
+            <a:off x="640080" y="2011679"/>
+            <a:ext cx="10911535" cy="4297680"/>
+          </a:xfrm>
+          <a:prstGeom prst="rect">
+            <a:avLst/>
+          </a:prstGeom>
+          <a:noFill/>
+        </p:spPr>
+        <p:txBody>
+          <a:bodyPr wrap="square" anchor="t" lIns="0" rIns="0" tIns="0" bIns="0">
+            <a:spAutoFit/>
+          </a:bodyPr>
+          <a:lstStyle/>
+          <a:p>
             <a:pPr>
               <a:spcAft>
                 <a:spcPts val="1000"/>
@@ -7357,7 +7361,7 @@
                 </a:solidFill>
                 <a:latin typeface="Calibri"/>
               </a:rPr>
-              <a:t>–   ☐ Escribí </a:t>
+              <a:t>–   </a:t>
             </a:r>
             <a:r>
               <a:rPr sz="1600" b="1" i="0">
@@ -7366,16 +7370,100 @@
                 </a:solidFill>
                 <a:latin typeface="Calibri"/>
               </a:rPr>
-              <a:t>un</a:t>
-            </a:r>
-            <a:r>
-              <a:rPr sz="1600" b="0" i="0">
-                <a:solidFill>
-                  <a:srgbClr val="2B2B2B"/>
-                </a:solidFill>
-                <a:latin typeface="Calibri"/>
-              </a:rPr>
-              <a:t> tipo dominante, no dos ni cinco.</a:t>
+              <a:t>Quedó bien si</a:t>
+            </a:r>
+            <a:r>
+              <a:rPr sz="1600" b="0" i="0">
+                <a:solidFill>
+                  <a:srgbClr val="2B2B2B"/>
+                </a:solidFill>
+                <a:latin typeface="Calibri"/>
+              </a:rPr>
+              <a:t> —compruébelo usted antes de cerrar el documento—:</a:t>
+            </a:r>
+          </a:p>
+          <a:p>
+            <a:pPr lvl="1">
+              <a:spcAft>
+                <a:spcPts val="600"/>
+              </a:spcAft>
+            </a:pPr>
+            <a:r>
+              <a:rPr sz="1500" b="0" i="0">
+                <a:solidFill>
+                  <a:srgbClr val="2B2B2B"/>
+                </a:solidFill>
+                <a:latin typeface="Calibri"/>
+              </a:rPr>
+              <a:t>●   El tipo dominante está </a:t>
+            </a:r>
+            <a:r>
+              <a:rPr sz="1500" b="1" i="0">
+                <a:solidFill>
+                  <a:srgbClr val="2B2B2B"/>
+                </a:solidFill>
+                <a:latin typeface="Calibri"/>
+              </a:rPr>
+              <a:t>justificado</a:t>
+            </a:r>
+            <a:r>
+              <a:rPr sz="1500" b="0" i="0">
+                <a:solidFill>
+                  <a:srgbClr val="2B2B2B"/>
+                </a:solidFill>
+                <a:latin typeface="Calibri"/>
+              </a:rPr>
+              <a:t> con una razón, no solo nombrado.</a:t>
+            </a:r>
+          </a:p>
+          <a:p>
+            <a:pPr lvl="1">
+              <a:spcAft>
+                <a:spcPts val="600"/>
+              </a:spcAft>
+            </a:pPr>
+            <a:r>
+              <a:rPr sz="1500" b="0" i="0">
+                <a:solidFill>
+                  <a:srgbClr val="2B2B2B"/>
+                </a:solidFill>
+                <a:latin typeface="Calibri"/>
+              </a:rPr>
+              <a:t>●   Las dos actividades de gestión tienen </a:t>
+            </a:r>
+            <a:r>
+              <a:rPr sz="1500" b="1" i="0">
+                <a:solidFill>
+                  <a:srgbClr val="2B2B2B"/>
+                </a:solidFill>
+                <a:latin typeface="Calibri"/>
+              </a:rPr>
+              <a:t>responsable y fecha real</a:t>
+            </a:r>
+            <a:r>
+              <a:rPr sz="1500" b="0" i="0">
+                <a:solidFill>
+                  <a:srgbClr val="2B2B2B"/>
+                </a:solidFill>
+                <a:latin typeface="Calibri"/>
+              </a:rPr>
+              <a:t>.</a:t>
+            </a:r>
+          </a:p>
+          <a:p>
+            <a:pPr lvl="1">
+              <a:spcAft>
+                <a:spcPts val="600"/>
+              </a:spcAft>
+            </a:pPr>
+            <a:r>
+              <a:rPr sz="1500" b="0" i="0">
+                <a:solidFill>
+                  <a:srgbClr val="2B2B2B"/>
+                </a:solidFill>
+                <a:latin typeface="Calibri"/>
+              </a:rPr>
+              <a:t>●   No queda ninguna frase que sirva igual para otro proyecto.</a:t>
             </a:r>
           </a:p>
           <a:p>
@@ -7391,7 +7479,7 @@
                 </a:solidFill>
                 <a:latin typeface="Calibri"/>
               </a:rPr>
-              <a:t>–   ☐ Mi justificación empieza por </a:t>
+              <a:t>–   </a:t>
             </a:r>
             <a:r>
               <a:rPr sz="1600" b="1" i="0">
@@ -7400,16 +7488,16 @@
                 </a:solidFill>
                 <a:latin typeface="Calibri"/>
               </a:rPr>
-              <a:t>"porque lo que cambia es..."</a:t>
-            </a:r>
-            <a:r>
-              <a:rPr sz="1600" b="0" i="0">
-                <a:solidFill>
-                  <a:srgbClr val="2B2B2B"/>
-                </a:solidFill>
-                <a:latin typeface="Calibri"/>
-              </a:rPr>
-              <a:t> y nombra el cambio concreto.</a:t>
+              <a:t>Plan B:</a:t>
+            </a:r>
+            <a:r>
+              <a:rPr sz="1600" b="0" i="0">
+                <a:solidFill>
+                  <a:srgbClr val="2B2B2B"/>
+                </a:solidFill>
+                <a:latin typeface="Calibri"/>
+              </a:rPr>
+              <a:t> Si duda entre dos tipos, use la tabla de desempate: ¿lo que cambia es una función nueva, o el mismo resultado con menos tiempo o menos error?</a:t>
             </a:r>
           </a:p>
           <a:p>
@@ -7425,7 +7513,7 @@
                 </a:solidFill>
                 <a:latin typeface="Calibri"/>
               </a:rPr>
-              <a:t>–   ☐ En "novedad" digo </a:t>
+              <a:t>–   </a:t>
             </a:r>
             <a:r>
               <a:rPr sz="1600" b="1" i="0">
@@ -7434,16 +7522,34 @@
                 </a:solidFill>
                 <a:latin typeface="Calibri"/>
               </a:rPr>
-              <a:t>para quién</a:t>
-            </a:r>
-            <a:r>
-              <a:rPr sz="1600" b="0" i="0">
-                <a:solidFill>
-                  <a:srgbClr val="2B2B2B"/>
-                </a:solidFill>
-                <a:latin typeface="Calibri"/>
-              </a:rPr>
-              <a:t> es nuevo (mi área, mi campus, mi usuario) — no escribí "es único".</a:t>
+              <a:t>Hoy no se sube nada al aula:</a:t>
+            </a:r>
+            <a:r>
+              <a:rPr sz="1600" b="0" i="0">
+                <a:solidFill>
+                  <a:srgbClr val="2B2B2B"/>
+                </a:solidFill>
+                <a:latin typeface="Calibri"/>
+              </a:rPr>
+              <a:t> guarde `S03_FichaOslo_Apellido` (Google Doc o PDF) en su Drive y tráigalo a la próxima sesión. Es un </a:t>
+            </a:r>
+            <a:r>
+              <a:rPr sz="1600" b="1" i="0">
+                <a:solidFill>
+                  <a:srgbClr val="2B2B2B"/>
+                </a:solidFill>
+                <a:latin typeface="Calibri"/>
+              </a:rPr>
+              <a:t>avance formativo</a:t>
+            </a:r>
+            <a:r>
+              <a:rPr sz="1600" b="0" i="0">
+                <a:solidFill>
+                  <a:srgbClr val="2B2B2B"/>
+                </a:solidFill>
+                <a:latin typeface="Calibri"/>
+              </a:rPr>
+              <a:t>, se revisa en clase.</a:t>
             </a:r>
           </a:p>
           <a:p>
@@ -7459,7 +7565,7 @@
                 </a:solidFill>
                 <a:latin typeface="Calibri"/>
               </a:rPr>
-              <a:t>–   ☐ Mi "valor" está escrito </a:t>
+              <a:t>–   </a:t>
             </a:r>
             <a:r>
               <a:rPr sz="1600" b="1" i="0">
@@ -7468,32 +7574,16 @@
                 </a:solidFill>
                 <a:latin typeface="Calibri"/>
               </a:rPr>
-              <a:t>desde el usuario</a:t>
-            </a:r>
-            <a:r>
-              <a:rPr sz="1600" b="0" i="0">
-                <a:solidFill>
-                  <a:srgbClr val="2B2B2B"/>
-                </a:solidFill>
-                <a:latin typeface="Calibri"/>
-              </a:rPr>
-              <a:t> y no menciona ninguna característica técnica.</a:t>
-            </a:r>
-          </a:p>
-          <a:p>
-            <a:pPr>
-              <a:spcAft>
-                <a:spcPts val="1000"/>
-              </a:spcAft>
-            </a:pPr>
-            <a:r>
-              <a:rPr sz="1600" b="0" i="0">
-                <a:solidFill>
-                  <a:srgbClr val="2B2B2B"/>
-                </a:solidFill>
-                <a:latin typeface="Calibri"/>
-              </a:rPr>
-              <a:t>–   ☐ Mis </a:t>
+              <a:t>Esto alimenta:</a:t>
+            </a:r>
+            <a:r>
+              <a:rPr sz="1600" b="0" i="0">
+                <a:solidFill>
+                  <a:srgbClr val="2B2B2B"/>
+                </a:solidFill>
+                <a:latin typeface="Calibri"/>
+              </a:rPr>
+              <a:t> </a:t>
             </a:r>
             <a:r>
               <a:rPr sz="1600" b="1" i="0">
@@ -7502,16 +7592,16 @@
                 </a:solidFill>
                 <a:latin typeface="Calibri"/>
               </a:rPr>
-              <a:t>dos actividades</a:t>
-            </a:r>
-            <a:r>
-              <a:rPr sz="1600" b="0" i="0">
-                <a:solidFill>
-                  <a:srgbClr val="2B2B2B"/>
-                </a:solidFill>
-                <a:latin typeface="Calibri"/>
-              </a:rPr>
-              <a:t> tienen </a:t>
+              <a:t>ACA Final</a:t>
+            </a:r>
+            <a:r>
+              <a:rPr sz="1600" b="0" i="0">
+                <a:solidFill>
+                  <a:srgbClr val="2B2B2B"/>
+                </a:solidFill>
+                <a:latin typeface="Calibri"/>
+              </a:rPr>
+              <a:t> —tarea, 32,8%—, el documento que </a:t>
             </a:r>
             <a:r>
               <a:rPr sz="1600" b="1" i="0">
@@ -7520,32 +7610,16 @@
                 </a:solidFill>
                 <a:latin typeface="Calibri"/>
               </a:rPr>
-              <a:t>verbo + responsable + fecha</a:t>
-            </a:r>
-            <a:r>
-              <a:rPr sz="1600" b="0" i="0">
-                <a:solidFill>
-                  <a:srgbClr val="2B2B2B"/>
-                </a:solidFill>
-                <a:latin typeface="Calibri"/>
-              </a:rPr>
-              <a:t>. Ninguna dice solo "investigar".</a:t>
-            </a:r>
-          </a:p>
-          <a:p>
-            <a:pPr>
-              <a:spcAft>
-                <a:spcPts val="1000"/>
-              </a:spcAft>
-            </a:pPr>
-            <a:r>
-              <a:rPr sz="1600" b="0" i="0">
-                <a:solidFill>
-                  <a:srgbClr val="2B2B2B"/>
-                </a:solidFill>
-                <a:latin typeface="Calibri"/>
-              </a:rPr>
-              <a:t>–   ☐ Mi riesgo #1 es de verdad el que </a:t>
+              <a:t>sí</a:t>
+            </a:r>
+            <a:r>
+              <a:rPr sz="1600" b="0" i="0">
+                <a:solidFill>
+                  <a:srgbClr val="2B2B2B"/>
+                </a:solidFill>
+                <a:latin typeface="Calibri"/>
+              </a:rPr>
+              <a:t> recibe </a:t>
             </a:r>
             <a:r>
               <a:rPr sz="1600" b="1" i="0">
@@ -7554,48 +7628,16 @@
                 </a:solidFill>
                 <a:latin typeface="Calibri"/>
               </a:rPr>
-              <a:t>tumbaría</a:t>
-            </a:r>
-            <a:r>
-              <a:rPr sz="1600" b="0" i="0">
-                <a:solidFill>
-                  <a:srgbClr val="2B2B2B"/>
-                </a:solidFill>
-                <a:latin typeface="Calibri"/>
-              </a:rPr>
-              <a:t> el proyecto, no un inconveniente menor.</a:t>
-            </a:r>
-          </a:p>
-          <a:p>
-            <a:pPr>
-              <a:spcAft>
-                <a:spcPts val="1000"/>
-              </a:spcAft>
-            </a:pPr>
-            <a:r>
-              <a:rPr sz="1600" b="0" i="0">
-                <a:solidFill>
-                  <a:srgbClr val="2B2B2B"/>
-                </a:solidFill>
-                <a:latin typeface="Calibri"/>
-              </a:rPr>
-              <a:t>–   ☐ Releí la ficha buscando frases genéricas y las reescribí.</a:t>
-            </a:r>
-          </a:p>
-          <a:p>
-            <a:pPr>
-              <a:spcAft>
-                <a:spcPts val="1000"/>
-              </a:spcAft>
-            </a:pPr>
-            <a:r>
-              <a:rPr sz="1600" b="0" i="0">
-                <a:solidFill>
-                  <a:srgbClr val="2B2B2B"/>
-                </a:solidFill>
-                <a:latin typeface="Calibri"/>
-              </a:rPr>
-              <a:t>–   ☐ El archivo se llama </a:t>
+              <a:t>CDigital</a:t>
+            </a:r>
+            <a:r>
+              <a:rPr sz="1600" b="0" i="0">
+                <a:solidFill>
+                  <a:srgbClr val="2B2B2B"/>
+                </a:solidFill>
+                <a:latin typeface="Calibri"/>
+              </a:rPr>
+              <a:t>; cierra en la semana de la </a:t>
             </a:r>
             <a:r>
               <a:rPr sz="1600" b="1" i="0">
@@ -7604,25 +7646,7 @@
                 </a:solidFill>
                 <a:latin typeface="Calibri"/>
               </a:rPr>
-              <a:t>`S03_FichaOslo_Apellido`</a:t>
-            </a:r>
-            <a:r>
-              <a:rPr sz="1600" b="0" i="0">
-                <a:solidFill>
-                  <a:srgbClr val="2B2B2B"/>
-                </a:solidFill>
-                <a:latin typeface="Calibri"/>
-              </a:rPr>
-              <a:t> y está en </a:t>
-            </a:r>
-            <a:r>
-              <a:rPr sz="1600" b="1" i="0">
-                <a:solidFill>
-                  <a:srgbClr val="2B2B2B"/>
-                </a:solidFill>
-                <a:latin typeface="Calibri"/>
-              </a:rPr>
-              <a:t>CDigital</a:t>
+              <a:t>Sesión 06</a:t>
             </a:r>
             <a:r>
               <a:rPr sz="1600" b="0" i="0">
@@ -7634,27 +7658,11 @@
               <a:t>.</a:t>
             </a:r>
           </a:p>
-          <a:p>
-            <a:pPr>
-              <a:spcAft>
-                <a:spcPts val="1000"/>
-              </a:spcAft>
-            </a:pPr>
-            <a:r>
-              <a:rPr sz="1600" b="0" i="0">
-                <a:solidFill>
-                  <a:srgbClr val="2B2B2B"/>
-                </a:solidFill>
-                <a:latin typeface="Calibri"/>
-              </a:rPr>
-              <a:t>–   Prueba final: si le muestro su ficha a un compañero, ¿sabría decir de qué se trata su proyecto? Si no, falta concreción.</a:t>
-            </a:r>
-          </a:p>
-        </p:txBody>
-      </p:sp>
-      <p:sp>
-        <p:nvSpPr>
-          <p:cNvPr id="5" name="TextBox 4"/>
+        </p:txBody>
+      </p:sp>
+      <p:sp>
+        <p:nvSpPr>
+          <p:cNvPr id="6" name="TextBox 5"/>
           <p:cNvSpPr txBox="1"/>
           <p:nvPr/>
         </p:nvSpPr>
@@ -7787,7 +7795,7 @@
                 </a:solidFill>
                 <a:latin typeface="Calibri"/>
               </a:rPr>
-              <a:t>Para continuar — trabajo autónomo</a:t>
+              <a:t>Antes de entregar: revise usted mismo</a:t>
             </a:r>
           </a:p>
         </p:txBody>
@@ -7826,7 +7834,7 @@
                 </a:solidFill>
                 <a:latin typeface="Calibri"/>
               </a:rPr>
-              <a:t>–   </a:t>
+              <a:t>–   ☐ Escribí </a:t>
             </a:r>
             <a:r>
               <a:rPr sz="1600" b="1" i="0">
@@ -7835,127 +7843,16 @@
                 </a:solidFill>
                 <a:latin typeface="Calibri"/>
               </a:rPr>
-              <a:t>Tres ideas para llevarse de hoy:</a:t>
-            </a:r>
-          </a:p>
-          <a:p>
-            <a:pPr lvl="1">
-              <a:spcAft>
-                <a:spcPts val="600"/>
-              </a:spcAft>
-            </a:pPr>
-            <a:r>
-              <a:rPr sz="1500" b="0" i="0">
-                <a:solidFill>
-                  <a:srgbClr val="2B2B2B"/>
-                </a:solidFill>
-                <a:latin typeface="Calibri"/>
-              </a:rPr>
-              <a:t>●   1. Gestionar innovación es imponer </a:t>
-            </a:r>
-            <a:r>
-              <a:rPr sz="1500" b="1" i="0">
-                <a:solidFill>
-                  <a:srgbClr val="2B2B2B"/>
-                </a:solidFill>
-                <a:latin typeface="Calibri"/>
-              </a:rPr>
-              <a:t>ritmo y criterio</a:t>
-            </a:r>
-            <a:r>
-              <a:rPr sz="1500" b="0" i="0">
-                <a:solidFill>
-                  <a:srgbClr val="2B2B2B"/>
-                </a:solidFill>
-                <a:latin typeface="Calibri"/>
-              </a:rPr>
-              <a:t>, no hacer más reuniones.</a:t>
-            </a:r>
-          </a:p>
-          <a:p>
-            <a:pPr lvl="1">
-              <a:spcAft>
-                <a:spcPts val="600"/>
-              </a:spcAft>
-            </a:pPr>
-            <a:r>
-              <a:rPr sz="1500" b="0" i="0">
-                <a:solidFill>
-                  <a:srgbClr val="2B2B2B"/>
-                </a:solidFill>
-                <a:latin typeface="Calibri"/>
-              </a:rPr>
-              <a:t>●   2. El </a:t>
-            </a:r>
-            <a:r>
-              <a:rPr sz="1500" b="1" i="0">
-                <a:solidFill>
-                  <a:srgbClr val="2B2B2B"/>
-                </a:solidFill>
-                <a:latin typeface="Calibri"/>
-              </a:rPr>
-              <a:t>Manual de Oslo</a:t>
-            </a:r>
-            <a:r>
-              <a:rPr sz="1500" b="0" i="0">
-                <a:solidFill>
-                  <a:srgbClr val="2B2B2B"/>
-                </a:solidFill>
-                <a:latin typeface="Calibri"/>
-              </a:rPr>
-              <a:t> nos da </a:t>
-            </a:r>
-            <a:r>
-              <a:rPr sz="1500" b="1" i="0">
-                <a:solidFill>
-                  <a:srgbClr val="2B2B2B"/>
-                </a:solidFill>
-                <a:latin typeface="Calibri"/>
-              </a:rPr>
-              <a:t>cinco tipos</a:t>
-            </a:r>
-            <a:r>
-              <a:rPr sz="1500" b="0" i="0">
-                <a:solidFill>
-                  <a:srgbClr val="2B2B2B"/>
-                </a:solidFill>
-                <a:latin typeface="Calibri"/>
-              </a:rPr>
-              <a:t> para hablar el mismo idioma.</a:t>
-            </a:r>
-          </a:p>
-          <a:p>
-            <a:pPr lvl="1">
-              <a:spcAft>
-                <a:spcPts val="600"/>
-              </a:spcAft>
-            </a:pPr>
-            <a:r>
-              <a:rPr sz="1500" b="0" i="0">
-                <a:solidFill>
-                  <a:srgbClr val="2B2B2B"/>
-                </a:solidFill>
-                <a:latin typeface="Calibri"/>
-              </a:rPr>
-              <a:t>●   3. Sin </a:t>
-            </a:r>
-            <a:r>
-              <a:rPr sz="1500" b="1" i="0">
-                <a:solidFill>
-                  <a:srgbClr val="2B2B2B"/>
-                </a:solidFill>
-                <a:latin typeface="Calibri"/>
-              </a:rPr>
-              <a:t>novedad e implementación</a:t>
-            </a:r>
-            <a:r>
-              <a:rPr sz="1500" b="0" i="0">
-                <a:solidFill>
-                  <a:srgbClr val="2B2B2B"/>
-                </a:solidFill>
-                <a:latin typeface="Calibri"/>
-              </a:rPr>
-              <a:t>, sigue siendo una idea, no una innovación.</a:t>
+              <a:t>un</a:t>
+            </a:r>
+            <a:r>
+              <a:rPr sz="1600" b="0" i="0">
+                <a:solidFill>
+                  <a:srgbClr val="2B2B2B"/>
+                </a:solidFill>
+                <a:latin typeface="Calibri"/>
+              </a:rPr>
+              <a:t> tipo dominante, no dos ni cinco.</a:t>
             </a:r>
           </a:p>
           <a:p>
@@ -7971,7 +7868,7 @@
                 </a:solidFill>
                 <a:latin typeface="Calibri"/>
               </a:rPr>
-              <a:t>–   </a:t>
+              <a:t>–   ☐ Mi justificación empieza por </a:t>
             </a:r>
             <a:r>
               <a:rPr sz="1600" b="1" i="0">
@@ -7980,68 +7877,16 @@
                 </a:solidFill>
                 <a:latin typeface="Calibri"/>
               </a:rPr>
-              <a:t>(a)</a:t>
-            </a:r>
-            <a:r>
-              <a:rPr sz="1600" b="0" i="0">
-                <a:solidFill>
-                  <a:srgbClr val="2B2B2B"/>
-                </a:solidFill>
-                <a:latin typeface="Calibri"/>
-              </a:rPr>
-              <a:t> Suban su ficha como </a:t>
-            </a:r>
-            <a:r>
-              <a:rPr sz="1600" b="1" i="0">
-                <a:solidFill>
-                  <a:srgbClr val="2B2B2B"/>
-                </a:solidFill>
-                <a:latin typeface="Calibri"/>
-              </a:rPr>
-              <a:t>`S03_FichaOslo_Apellido`</a:t>
-            </a:r>
-            <a:r>
-              <a:rPr sz="1600" b="0" i="0">
-                <a:solidFill>
-                  <a:srgbClr val="2B2B2B"/>
-                </a:solidFill>
-                <a:latin typeface="Calibri"/>
-              </a:rPr>
-              <a:t> a </a:t>
-            </a:r>
-            <a:r>
-              <a:rPr sz="1600" b="1" i="0">
-                <a:solidFill>
-                  <a:srgbClr val="2B2B2B"/>
-                </a:solidFill>
-                <a:latin typeface="Calibri"/>
-              </a:rPr>
-              <a:t>CDigital</a:t>
-            </a:r>
-            <a:r>
-              <a:rPr sz="1600" b="0" i="0">
-                <a:solidFill>
-                  <a:srgbClr val="2B2B2B"/>
-                </a:solidFill>
-                <a:latin typeface="Calibri"/>
-              </a:rPr>
-              <a:t>.</a:t>
-            </a:r>
-          </a:p>
-          <a:p>
-            <a:pPr lvl="1">
-              <a:spcAft>
-                <a:spcPts val="600"/>
-              </a:spcAft>
-            </a:pPr>
-            <a:r>
-              <a:rPr sz="1500" b="0" i="0">
-                <a:solidFill>
-                  <a:srgbClr val="2B2B2B"/>
-                </a:solidFill>
-                <a:latin typeface="Calibri"/>
-              </a:rPr>
-              <a:t>●   Plataforma: [URL CDigital — campus del curso pendiente]</a:t>
+              <a:t>"porque lo que cambia es..."</a:t>
+            </a:r>
+            <a:r>
+              <a:rPr sz="1600" b="0" i="0">
+                <a:solidFill>
+                  <a:srgbClr val="2B2B2B"/>
+                </a:solidFill>
+                <a:latin typeface="Calibri"/>
+              </a:rPr>
+              <a:t> y nombra el cambio concreto.</a:t>
             </a:r>
           </a:p>
           <a:p>
@@ -8057,7 +7902,7 @@
                 </a:solidFill>
                 <a:latin typeface="Calibri"/>
               </a:rPr>
-              <a:t>–   </a:t>
+              <a:t>–   ☐ En "novedad" digo </a:t>
             </a:r>
             <a:r>
               <a:rPr sz="1600" b="1" i="0">
@@ -8066,102 +7911,220 @@
                 </a:solidFill>
                 <a:latin typeface="Calibri"/>
               </a:rPr>
-              <a:t>(b)</a:t>
-            </a:r>
-            <a:r>
-              <a:rPr sz="1600" b="0" i="0">
-                <a:solidFill>
-                  <a:srgbClr val="2B2B2B"/>
-                </a:solidFill>
-                <a:latin typeface="Calibri"/>
-              </a:rPr>
-              <a:t> Traigan un </a:t>
-            </a:r>
-            <a:r>
-              <a:rPr sz="1600" b="1" i="0">
-                <a:solidFill>
-                  <a:srgbClr val="2B2B2B"/>
-                </a:solidFill>
-                <a:latin typeface="Calibri"/>
-              </a:rPr>
-              <a:t>cuadro comparativo</a:t>
-            </a:r>
-            <a:r>
-              <a:rPr sz="1600" b="0" i="0">
-                <a:solidFill>
-                  <a:srgbClr val="2B2B2B"/>
-                </a:solidFill>
-                <a:latin typeface="Calibri"/>
-              </a:rPr>
-              <a:t> de su tipo elegido </a:t>
-            </a:r>
-            <a:r>
-              <a:rPr sz="1600" b="1" i="0">
-                <a:solidFill>
-                  <a:srgbClr val="2B2B2B"/>
-                </a:solidFill>
-                <a:latin typeface="Calibri"/>
-              </a:rPr>
-              <a:t>contra un tipo alternativo que descartaron</a:t>
-            </a:r>
-            <a:r>
-              <a:rPr sz="1600" b="0" i="0">
-                <a:solidFill>
-                  <a:srgbClr val="2B2B2B"/>
-                </a:solidFill>
-                <a:latin typeface="Calibri"/>
-              </a:rPr>
-              <a:t>, explicando </a:t>
-            </a:r>
-            <a:r>
-              <a:rPr sz="1600" b="1" i="0">
-                <a:solidFill>
-                  <a:srgbClr val="2B2B2B"/>
-                </a:solidFill>
-                <a:latin typeface="Calibri"/>
-              </a:rPr>
-              <a:t>por qué no</a:t>
-            </a:r>
-            <a:r>
-              <a:rPr sz="1600" b="0" i="0">
-                <a:solidFill>
-                  <a:srgbClr val="2B2B2B"/>
-                </a:solidFill>
-                <a:latin typeface="Calibri"/>
-              </a:rPr>
-              <a:t>.</a:t>
-            </a:r>
-          </a:p>
-          <a:p>
-            <a:pPr lvl="1">
+              <a:t>para quién</a:t>
+            </a:r>
+            <a:r>
+              <a:rPr sz="1600" b="0" i="0">
+                <a:solidFill>
+                  <a:srgbClr val="2B2B2B"/>
+                </a:solidFill>
+                <a:latin typeface="Calibri"/>
+              </a:rPr>
+              <a:t> es nuevo (mi área, mi campus, mi usuario) — no escribí "es único".</a:t>
+            </a:r>
+          </a:p>
+          <a:p>
+            <a:pPr>
               <a:spcAft>
-                <a:spcPts val="600"/>
+                <a:spcPts val="1000"/>
               </a:spcAft>
             </a:pPr>
             <a:r>
-              <a:rPr sz="1500" b="0" i="0">
-                <a:solidFill>
-                  <a:srgbClr val="2B2B2B"/>
-                </a:solidFill>
-                <a:latin typeface="Calibri"/>
-              </a:rPr>
-              <a:t>●   Ejemplo: "elegí proceso y descarté producto, porque el usuario no recibe una función nueva sino el mismo servicio más rápido".</a:t>
-            </a:r>
-          </a:p>
-          <a:p>
-            <a:pPr lvl="1">
+              <a:rPr sz="1600" b="0" i="0">
+                <a:solidFill>
+                  <a:srgbClr val="2B2B2B"/>
+                </a:solidFill>
+                <a:latin typeface="Calibri"/>
+              </a:rPr>
+              <a:t>–   ☐ Mi "valor" está escrito </a:t>
+            </a:r>
+            <a:r>
+              <a:rPr sz="1600" b="1" i="0">
+                <a:solidFill>
+                  <a:srgbClr val="2B2B2B"/>
+                </a:solidFill>
+                <a:latin typeface="Calibri"/>
+              </a:rPr>
+              <a:t>desde el usuario</a:t>
+            </a:r>
+            <a:r>
+              <a:rPr sz="1600" b="0" i="0">
+                <a:solidFill>
+                  <a:srgbClr val="2B2B2B"/>
+                </a:solidFill>
+                <a:latin typeface="Calibri"/>
+              </a:rPr>
+              <a:t> y no menciona ninguna característica técnica.</a:t>
+            </a:r>
+          </a:p>
+          <a:p>
+            <a:pPr>
               <a:spcAft>
-                <a:spcPts val="600"/>
+                <a:spcPts val="1000"/>
               </a:spcAft>
             </a:pPr>
             <a:r>
-              <a:rPr sz="1500" b="0" i="0">
-                <a:solidFill>
-                  <a:srgbClr val="2B2B2B"/>
-                </a:solidFill>
-                <a:latin typeface="Calibri"/>
-              </a:rPr>
-              <a:t>●   Ese cuadro es exactamente el punto de partida de la próxima sesión, así que llévenlo escrito.</a:t>
+              <a:rPr sz="1600" b="0" i="0">
+                <a:solidFill>
+                  <a:srgbClr val="2B2B2B"/>
+                </a:solidFill>
+                <a:latin typeface="Calibri"/>
+              </a:rPr>
+              <a:t>–   ☐ Mis </a:t>
+            </a:r>
+            <a:r>
+              <a:rPr sz="1600" b="1" i="0">
+                <a:solidFill>
+                  <a:srgbClr val="2B2B2B"/>
+                </a:solidFill>
+                <a:latin typeface="Calibri"/>
+              </a:rPr>
+              <a:t>dos actividades</a:t>
+            </a:r>
+            <a:r>
+              <a:rPr sz="1600" b="0" i="0">
+                <a:solidFill>
+                  <a:srgbClr val="2B2B2B"/>
+                </a:solidFill>
+                <a:latin typeface="Calibri"/>
+              </a:rPr>
+              <a:t> tienen </a:t>
+            </a:r>
+            <a:r>
+              <a:rPr sz="1600" b="1" i="0">
+                <a:solidFill>
+                  <a:srgbClr val="2B2B2B"/>
+                </a:solidFill>
+                <a:latin typeface="Calibri"/>
+              </a:rPr>
+              <a:t>verbo + responsable + fecha</a:t>
+            </a:r>
+            <a:r>
+              <a:rPr sz="1600" b="0" i="0">
+                <a:solidFill>
+                  <a:srgbClr val="2B2B2B"/>
+                </a:solidFill>
+                <a:latin typeface="Calibri"/>
+              </a:rPr>
+              <a:t>. Ninguna dice solo "investigar".</a:t>
+            </a:r>
+          </a:p>
+          <a:p>
+            <a:pPr>
+              <a:spcAft>
+                <a:spcPts val="1000"/>
+              </a:spcAft>
+            </a:pPr>
+            <a:r>
+              <a:rPr sz="1600" b="0" i="0">
+                <a:solidFill>
+                  <a:srgbClr val="2B2B2B"/>
+                </a:solidFill>
+                <a:latin typeface="Calibri"/>
+              </a:rPr>
+              <a:t>–   ☐ Mi riesgo #1 es de verdad el que </a:t>
+            </a:r>
+            <a:r>
+              <a:rPr sz="1600" b="1" i="0">
+                <a:solidFill>
+                  <a:srgbClr val="2B2B2B"/>
+                </a:solidFill>
+                <a:latin typeface="Calibri"/>
+              </a:rPr>
+              <a:t>tumbaría</a:t>
+            </a:r>
+            <a:r>
+              <a:rPr sz="1600" b="0" i="0">
+                <a:solidFill>
+                  <a:srgbClr val="2B2B2B"/>
+                </a:solidFill>
+                <a:latin typeface="Calibri"/>
+              </a:rPr>
+              <a:t> el proyecto, no un inconveniente menor.</a:t>
+            </a:r>
+          </a:p>
+          <a:p>
+            <a:pPr>
+              <a:spcAft>
+                <a:spcPts val="1000"/>
+              </a:spcAft>
+            </a:pPr>
+            <a:r>
+              <a:rPr sz="1600" b="0" i="0">
+                <a:solidFill>
+                  <a:srgbClr val="2B2B2B"/>
+                </a:solidFill>
+                <a:latin typeface="Calibri"/>
+              </a:rPr>
+              <a:t>–   ☐ Releí la ficha buscando frases genéricas y las reescribí.</a:t>
+            </a:r>
+          </a:p>
+          <a:p>
+            <a:pPr>
+              <a:spcAft>
+                <a:spcPts val="1000"/>
+              </a:spcAft>
+            </a:pPr>
+            <a:r>
+              <a:rPr sz="1600" b="0" i="0">
+                <a:solidFill>
+                  <a:srgbClr val="2B2B2B"/>
+                </a:solidFill>
+                <a:latin typeface="Calibri"/>
+              </a:rPr>
+              <a:t>–   ☐ El archivo se llama </a:t>
+            </a:r>
+            <a:r>
+              <a:rPr sz="1600" b="1" i="0">
+                <a:solidFill>
+                  <a:srgbClr val="2B2B2B"/>
+                </a:solidFill>
+                <a:latin typeface="Calibri"/>
+              </a:rPr>
+              <a:t>`S03_FichaOslo_Apellido`</a:t>
+            </a:r>
+            <a:r>
+              <a:rPr sz="1600" b="0" i="0">
+                <a:solidFill>
+                  <a:srgbClr val="2B2B2B"/>
+                </a:solidFill>
+                <a:latin typeface="Calibri"/>
+              </a:rPr>
+              <a:t> y está en </a:t>
+            </a:r>
+            <a:r>
+              <a:rPr sz="1600" b="1" i="0">
+                <a:solidFill>
+                  <a:srgbClr val="2B2B2B"/>
+                </a:solidFill>
+                <a:latin typeface="Calibri"/>
+              </a:rPr>
+              <a:t>CDigital</a:t>
+            </a:r>
+            <a:r>
+              <a:rPr sz="1600" b="0" i="0">
+                <a:solidFill>
+                  <a:srgbClr val="2B2B2B"/>
+                </a:solidFill>
+                <a:latin typeface="Calibri"/>
+              </a:rPr>
+              <a:t>.</a:t>
+            </a:r>
+          </a:p>
+          <a:p>
+            <a:pPr>
+              <a:spcAft>
+                <a:spcPts val="1000"/>
+              </a:spcAft>
+            </a:pPr>
+            <a:r>
+              <a:rPr sz="1600" b="0" i="0">
+                <a:solidFill>
+                  <a:srgbClr val="2B2B2B"/>
+                </a:solidFill>
+                <a:latin typeface="Calibri"/>
+              </a:rPr>
+              <a:t>–   Prueba final: si le muestro su ficha a un compañero, ¿sabría decir de qué se trata su proyecto? Si no, falta concreción.</a:t>
             </a:r>
           </a:p>
         </p:txBody>
@@ -8718,7 +8681,7 @@
                 </a:solidFill>
                 <a:latin typeface="Calibri"/>
               </a:rPr>
-              <a:t>Para continuar — trabajo autónomo (cont.)</a:t>
+              <a:t>Para continuar — trabajo autónomo</a:t>
             </a:r>
           </a:p>
         </p:txBody>
@@ -8766,16 +8729,143 @@
                 </a:solidFill>
                 <a:latin typeface="Calibri"/>
               </a:rPr>
-              <a:t>Próxima sesión:</a:t>
-            </a:r>
-            <a:r>
-              <a:rPr sz="1600" b="0" i="0">
-                <a:solidFill>
-                  <a:srgbClr val="2B2B2B"/>
-                </a:solidFill>
-                <a:latin typeface="Calibri"/>
-              </a:rPr>
-              <a:t> Tipos de innovación a fondo — </a:t>
+              <a:t>Tres ideas para llevarse de hoy:</a:t>
+            </a:r>
+          </a:p>
+          <a:p>
+            <a:pPr lvl="1">
+              <a:spcAft>
+                <a:spcPts val="600"/>
+              </a:spcAft>
+            </a:pPr>
+            <a:r>
+              <a:rPr sz="1500" b="0" i="0">
+                <a:solidFill>
+                  <a:srgbClr val="2B2B2B"/>
+                </a:solidFill>
+                <a:latin typeface="Calibri"/>
+              </a:rPr>
+              <a:t>●   1. Gestionar innovación es imponer </a:t>
+            </a:r>
+            <a:r>
+              <a:rPr sz="1500" b="1" i="0">
+                <a:solidFill>
+                  <a:srgbClr val="2B2B2B"/>
+                </a:solidFill>
+                <a:latin typeface="Calibri"/>
+              </a:rPr>
+              <a:t>ritmo y criterio</a:t>
+            </a:r>
+            <a:r>
+              <a:rPr sz="1500" b="0" i="0">
+                <a:solidFill>
+                  <a:srgbClr val="2B2B2B"/>
+                </a:solidFill>
+                <a:latin typeface="Calibri"/>
+              </a:rPr>
+              <a:t>, no hacer más reuniones.</a:t>
+            </a:r>
+          </a:p>
+          <a:p>
+            <a:pPr lvl="1">
+              <a:spcAft>
+                <a:spcPts val="600"/>
+              </a:spcAft>
+            </a:pPr>
+            <a:r>
+              <a:rPr sz="1500" b="0" i="0">
+                <a:solidFill>
+                  <a:srgbClr val="2B2B2B"/>
+                </a:solidFill>
+                <a:latin typeface="Calibri"/>
+              </a:rPr>
+              <a:t>●   2. El </a:t>
+            </a:r>
+            <a:r>
+              <a:rPr sz="1500" b="1" i="0">
+                <a:solidFill>
+                  <a:srgbClr val="2B2B2B"/>
+                </a:solidFill>
+                <a:latin typeface="Calibri"/>
+              </a:rPr>
+              <a:t>Manual de Oslo</a:t>
+            </a:r>
+            <a:r>
+              <a:rPr sz="1500" b="0" i="0">
+                <a:solidFill>
+                  <a:srgbClr val="2B2B2B"/>
+                </a:solidFill>
+                <a:latin typeface="Calibri"/>
+              </a:rPr>
+              <a:t> nos da </a:t>
+            </a:r>
+            <a:r>
+              <a:rPr sz="1500" b="1" i="0">
+                <a:solidFill>
+                  <a:srgbClr val="2B2B2B"/>
+                </a:solidFill>
+                <a:latin typeface="Calibri"/>
+              </a:rPr>
+              <a:t>cinco tipos</a:t>
+            </a:r>
+            <a:r>
+              <a:rPr sz="1500" b="0" i="0">
+                <a:solidFill>
+                  <a:srgbClr val="2B2B2B"/>
+                </a:solidFill>
+                <a:latin typeface="Calibri"/>
+              </a:rPr>
+              <a:t> para hablar el mismo idioma.</a:t>
+            </a:r>
+          </a:p>
+          <a:p>
+            <a:pPr lvl="1">
+              <a:spcAft>
+                <a:spcPts val="600"/>
+              </a:spcAft>
+            </a:pPr>
+            <a:r>
+              <a:rPr sz="1500" b="0" i="0">
+                <a:solidFill>
+                  <a:srgbClr val="2B2B2B"/>
+                </a:solidFill>
+                <a:latin typeface="Calibri"/>
+              </a:rPr>
+              <a:t>●   3. Sin </a:t>
+            </a:r>
+            <a:r>
+              <a:rPr sz="1500" b="1" i="0">
+                <a:solidFill>
+                  <a:srgbClr val="2B2B2B"/>
+                </a:solidFill>
+                <a:latin typeface="Calibri"/>
+              </a:rPr>
+              <a:t>novedad e implementación</a:t>
+            </a:r>
+            <a:r>
+              <a:rPr sz="1500" b="0" i="0">
+                <a:solidFill>
+                  <a:srgbClr val="2B2B2B"/>
+                </a:solidFill>
+                <a:latin typeface="Calibri"/>
+              </a:rPr>
+              <a:t>, sigue siendo una idea, no una innovación.</a:t>
+            </a:r>
+          </a:p>
+          <a:p>
+            <a:pPr>
+              <a:spcAft>
+                <a:spcPts val="1000"/>
+              </a:spcAft>
+            </a:pPr>
+            <a:r>
+              <a:rPr sz="1600" b="0" i="0">
+                <a:solidFill>
+                  <a:srgbClr val="2B2B2B"/>
+                </a:solidFill>
+                <a:latin typeface="Calibri"/>
+              </a:rPr>
+              <a:t>–   </a:t>
             </a:r>
             <a:r>
               <a:rPr sz="1600" b="1" i="0">
@@ -8784,16 +8874,16 @@
                 </a:solidFill>
                 <a:latin typeface="Calibri"/>
               </a:rPr>
-              <a:t>incremental vs. radical</a:t>
-            </a:r>
-            <a:r>
-              <a:rPr sz="1600" b="0" i="0">
-                <a:solidFill>
-                  <a:srgbClr val="2B2B2B"/>
-                </a:solidFill>
-                <a:latin typeface="Calibri"/>
-              </a:rPr>
-              <a:t> y cómo </a:t>
+              <a:t>(a)</a:t>
+            </a:r>
+            <a:r>
+              <a:rPr sz="1600" b="0" i="0">
+                <a:solidFill>
+                  <a:srgbClr val="2B2B2B"/>
+                </a:solidFill>
+                <a:latin typeface="Calibri"/>
+              </a:rPr>
+              <a:t> Suban su ficha como </a:t>
             </a:r>
             <a:r>
               <a:rPr sz="1600" b="1" i="0">
@@ -8802,16 +8892,170 @@
                 </a:solidFill>
                 <a:latin typeface="Calibri"/>
               </a:rPr>
-              <a:t>argumentar</a:t>
-            </a:r>
-            <a:r>
-              <a:rPr sz="1600" b="0" i="0">
-                <a:solidFill>
-                  <a:srgbClr val="2B2B2B"/>
-                </a:solidFill>
-                <a:latin typeface="Calibri"/>
-              </a:rPr>
-              <a:t> su elección con criterios.</a:t>
+              <a:t>`S03_FichaOslo_Apellido`</a:t>
+            </a:r>
+            <a:r>
+              <a:rPr sz="1600" b="0" i="0">
+                <a:solidFill>
+                  <a:srgbClr val="2B2B2B"/>
+                </a:solidFill>
+                <a:latin typeface="Calibri"/>
+              </a:rPr>
+              <a:t> a </a:t>
+            </a:r>
+            <a:r>
+              <a:rPr sz="1600" b="1" i="0">
+                <a:solidFill>
+                  <a:srgbClr val="2B2B2B"/>
+                </a:solidFill>
+                <a:latin typeface="Calibri"/>
+              </a:rPr>
+              <a:t>CDigital</a:t>
+            </a:r>
+            <a:r>
+              <a:rPr sz="1600" b="0" i="0">
+                <a:solidFill>
+                  <a:srgbClr val="2B2B2B"/>
+                </a:solidFill>
+                <a:latin typeface="Calibri"/>
+              </a:rPr>
+              <a:t>.</a:t>
+            </a:r>
+          </a:p>
+          <a:p>
+            <a:pPr lvl="1">
+              <a:spcAft>
+                <a:spcPts val="600"/>
+              </a:spcAft>
+            </a:pPr>
+            <a:r>
+              <a:rPr sz="1500" b="0" i="0">
+                <a:solidFill>
+                  <a:srgbClr val="2B2B2B"/>
+                </a:solidFill>
+                <a:latin typeface="Calibri"/>
+              </a:rPr>
+              <a:t>●   Plataforma: https://cdigital.cun.edu.co/course/view.php?id=115463</a:t>
+            </a:r>
+          </a:p>
+          <a:p>
+            <a:pPr>
+              <a:spcAft>
+                <a:spcPts val="1000"/>
+              </a:spcAft>
+            </a:pPr>
+            <a:r>
+              <a:rPr sz="1600" b="0" i="0">
+                <a:solidFill>
+                  <a:srgbClr val="2B2B2B"/>
+                </a:solidFill>
+                <a:latin typeface="Calibri"/>
+              </a:rPr>
+              <a:t>–   </a:t>
+            </a:r>
+            <a:r>
+              <a:rPr sz="1600" b="1" i="0">
+                <a:solidFill>
+                  <a:srgbClr val="2B2B2B"/>
+                </a:solidFill>
+                <a:latin typeface="Calibri"/>
+              </a:rPr>
+              <a:t>(b)</a:t>
+            </a:r>
+            <a:r>
+              <a:rPr sz="1600" b="0" i="0">
+                <a:solidFill>
+                  <a:srgbClr val="2B2B2B"/>
+                </a:solidFill>
+                <a:latin typeface="Calibri"/>
+              </a:rPr>
+              <a:t> Traigan un </a:t>
+            </a:r>
+            <a:r>
+              <a:rPr sz="1600" b="1" i="0">
+                <a:solidFill>
+                  <a:srgbClr val="2B2B2B"/>
+                </a:solidFill>
+                <a:latin typeface="Calibri"/>
+              </a:rPr>
+              <a:t>cuadro comparativo</a:t>
+            </a:r>
+            <a:r>
+              <a:rPr sz="1600" b="0" i="0">
+                <a:solidFill>
+                  <a:srgbClr val="2B2B2B"/>
+                </a:solidFill>
+                <a:latin typeface="Calibri"/>
+              </a:rPr>
+              <a:t> de su tipo elegido </a:t>
+            </a:r>
+            <a:r>
+              <a:rPr sz="1600" b="1" i="0">
+                <a:solidFill>
+                  <a:srgbClr val="2B2B2B"/>
+                </a:solidFill>
+                <a:latin typeface="Calibri"/>
+              </a:rPr>
+              <a:t>contra un tipo alternativo que descartaron</a:t>
+            </a:r>
+            <a:r>
+              <a:rPr sz="1600" b="0" i="0">
+                <a:solidFill>
+                  <a:srgbClr val="2B2B2B"/>
+                </a:solidFill>
+                <a:latin typeface="Calibri"/>
+              </a:rPr>
+              <a:t>, explicando </a:t>
+            </a:r>
+            <a:r>
+              <a:rPr sz="1600" b="1" i="0">
+                <a:solidFill>
+                  <a:srgbClr val="2B2B2B"/>
+                </a:solidFill>
+                <a:latin typeface="Calibri"/>
+              </a:rPr>
+              <a:t>por qué no</a:t>
+            </a:r>
+            <a:r>
+              <a:rPr sz="1600" b="0" i="0">
+                <a:solidFill>
+                  <a:srgbClr val="2B2B2B"/>
+                </a:solidFill>
+                <a:latin typeface="Calibri"/>
+              </a:rPr>
+              <a:t>.</a:t>
+            </a:r>
+          </a:p>
+          <a:p>
+            <a:pPr lvl="1">
+              <a:spcAft>
+                <a:spcPts val="600"/>
+              </a:spcAft>
+            </a:pPr>
+            <a:r>
+              <a:rPr sz="1500" b="0" i="0">
+                <a:solidFill>
+                  <a:srgbClr val="2B2B2B"/>
+                </a:solidFill>
+                <a:latin typeface="Calibri"/>
+              </a:rPr>
+              <a:t>●   Ejemplo: "elegí proceso y descarté producto, porque el usuario no recibe una función nueva sino el mismo servicio más rápido".</a:t>
+            </a:r>
+          </a:p>
+          <a:p>
+            <a:pPr lvl="1">
+              <a:spcAft>
+                <a:spcPts val="600"/>
+              </a:spcAft>
+            </a:pPr>
+            <a:r>
+              <a:rPr sz="1500" b="0" i="0">
+                <a:solidFill>
+                  <a:srgbClr val="2B2B2B"/>
+                </a:solidFill>
+                <a:latin typeface="Calibri"/>
+              </a:rPr>
+              <a:t>●   Ese cuadro es exactamente el punto de partida de la próxima sesión, así que llévenlo escrito.</a:t>
             </a:r>
           </a:p>
         </p:txBody>
@@ -8860,6 +9104,1447 @@
 </file>
 
 <file path=ppt/slides/slide21.xml><?xml version="1.0" encoding="utf-8"?>
+<p:sld xmlns:a="http://schemas.openxmlformats.org/drawingml/2006/main" xmlns:p="http://schemas.openxmlformats.org/presentationml/2006/main" xmlns:r="http://schemas.openxmlformats.org/officeDocument/2006/relationships">
+  <p:cSld>
+    <p:bg>
+      <p:bgPr>
+        <a:solidFill>
+          <a:srgbClr val="FFFFFF"/>
+        </a:solidFill>
+        <a:effectLst/>
+      </p:bgPr>
+    </p:bg>
+    <p:spTree>
+      <p:nvGrpSpPr>
+        <p:cNvPr id="1" name=""/>
+        <p:cNvGrpSpPr/>
+        <p:nvPr/>
+      </p:nvGrpSpPr>
+      <p:grpSpPr/>
+      <p:sp>
+        <p:nvSpPr>
+          <p:cNvPr id="2" name="Rectangle 1"/>
+          <p:cNvSpPr/>
+          <p:nvPr/>
+        </p:nvSpPr>
+        <p:spPr>
+          <a:xfrm>
+            <a:off x="0" y="0"/>
+            <a:ext cx="12191695" cy="1188720"/>
+          </a:xfrm>
+          <a:prstGeom prst="rect">
+            <a:avLst/>
+          </a:prstGeom>
+          <a:solidFill>
+            <a:srgbClr val="0C2340"/>
+          </a:solidFill>
+          <a:ln>
+            <a:noFill/>
+          </a:ln>
+          <a:effectLst/>
+        </p:spPr>
+        <p:style>
+          <a:lnRef idx="1">
+            <a:schemeClr val="accent1"/>
+          </a:lnRef>
+          <a:fillRef idx="3">
+            <a:schemeClr val="accent1"/>
+          </a:fillRef>
+          <a:effectRef idx="2">
+            <a:schemeClr val="accent1"/>
+          </a:effectRef>
+          <a:fontRef idx="minor">
+            <a:schemeClr val="lt1"/>
+          </a:fontRef>
+        </p:style>
+        <p:txBody>
+          <a:bodyPr rtlCol="0" anchor="ctr"/>
+          <a:lstStyle/>
+          <a:p>
+            <a:pPr algn="ctr"/>
+          </a:p>
+        </p:txBody>
+      </p:sp>
+      <p:sp>
+        <p:nvSpPr>
+          <p:cNvPr id="3" name="TextBox 2"/>
+          <p:cNvSpPr txBox="1"/>
+          <p:nvPr/>
+        </p:nvSpPr>
+        <p:spPr>
+          <a:xfrm>
+            <a:off x="640080" y="0"/>
+            <a:ext cx="9082735" cy="1188720"/>
+          </a:xfrm>
+          <a:prstGeom prst="rect">
+            <a:avLst/>
+          </a:prstGeom>
+          <a:noFill/>
+        </p:spPr>
+        <p:txBody>
+          <a:bodyPr wrap="square" anchor="ctr" lIns="0" rIns="0" tIns="0" bIns="0">
+            <a:spAutoFit/>
+          </a:bodyPr>
+          <a:lstStyle/>
+          <a:p>
+            <a:pPr algn="ctr"/>
+            <a:r>
+              <a:rPr sz="2600" b="1" i="0">
+                <a:solidFill>
+                  <a:srgbClr val="FFFFFF"/>
+                </a:solidFill>
+                <a:latin typeface="Calibri"/>
+              </a:rPr>
+              <a:t>Para continuar — trabajo autónomo (cont.)</a:t>
+            </a:r>
+          </a:p>
+        </p:txBody>
+      </p:sp>
+      <p:sp>
+        <p:nvSpPr>
+          <p:cNvPr id="4" name="TextBox 3"/>
+          <p:cNvSpPr txBox="1"/>
+          <p:nvPr/>
+        </p:nvSpPr>
+        <p:spPr>
+          <a:xfrm>
+            <a:off x="640080" y="1691639"/>
+            <a:ext cx="10911535" cy="4617720"/>
+          </a:xfrm>
+          <a:prstGeom prst="rect">
+            <a:avLst/>
+          </a:prstGeom>
+          <a:noFill/>
+        </p:spPr>
+        <p:txBody>
+          <a:bodyPr wrap="square" anchor="t" lIns="0" rIns="0" tIns="0" bIns="0">
+            <a:spAutoFit/>
+          </a:bodyPr>
+          <a:lstStyle/>
+          <a:p>
+            <a:pPr>
+              <a:spcAft>
+                <a:spcPts val="1000"/>
+              </a:spcAft>
+            </a:pPr>
+            <a:r>
+              <a:rPr sz="1600" b="0" i="0">
+                <a:solidFill>
+                  <a:srgbClr val="2B2B2B"/>
+                </a:solidFill>
+                <a:latin typeface="Calibri"/>
+              </a:rPr>
+              <a:t>–   </a:t>
+            </a:r>
+            <a:r>
+              <a:rPr sz="1600" b="1" i="0">
+                <a:solidFill>
+                  <a:srgbClr val="2B2B2B"/>
+                </a:solidFill>
+                <a:latin typeface="Calibri"/>
+              </a:rPr>
+              <a:t>Próxima sesión:</a:t>
+            </a:r>
+            <a:r>
+              <a:rPr sz="1600" b="0" i="0">
+                <a:solidFill>
+                  <a:srgbClr val="2B2B2B"/>
+                </a:solidFill>
+                <a:latin typeface="Calibri"/>
+              </a:rPr>
+              <a:t> Tipos de innovación a fondo — </a:t>
+            </a:r>
+            <a:r>
+              <a:rPr sz="1600" b="1" i="0">
+                <a:solidFill>
+                  <a:srgbClr val="2B2B2B"/>
+                </a:solidFill>
+                <a:latin typeface="Calibri"/>
+              </a:rPr>
+              <a:t>incremental vs. radical</a:t>
+            </a:r>
+            <a:r>
+              <a:rPr sz="1600" b="0" i="0">
+                <a:solidFill>
+                  <a:srgbClr val="2B2B2B"/>
+                </a:solidFill>
+                <a:latin typeface="Calibri"/>
+              </a:rPr>
+              <a:t> y cómo </a:t>
+            </a:r>
+            <a:r>
+              <a:rPr sz="1600" b="1" i="0">
+                <a:solidFill>
+                  <a:srgbClr val="2B2B2B"/>
+                </a:solidFill>
+                <a:latin typeface="Calibri"/>
+              </a:rPr>
+              <a:t>argumentar</a:t>
+            </a:r>
+            <a:r>
+              <a:rPr sz="1600" b="0" i="0">
+                <a:solidFill>
+                  <a:srgbClr val="2B2B2B"/>
+                </a:solidFill>
+                <a:latin typeface="Calibri"/>
+              </a:rPr>
+              <a:t> su elección con criterios.</a:t>
+            </a:r>
+          </a:p>
+        </p:txBody>
+      </p:sp>
+      <p:sp>
+        <p:nvSpPr>
+          <p:cNvPr id="5" name="TextBox 4"/>
+          <p:cNvSpPr txBox="1"/>
+          <p:nvPr/>
+        </p:nvSpPr>
+        <p:spPr>
+          <a:xfrm>
+            <a:off x="11094415" y="6446520"/>
+            <a:ext cx="548640" cy="274320"/>
+          </a:xfrm>
+          <a:prstGeom prst="rect">
+            <a:avLst/>
+          </a:prstGeom>
+          <a:noFill/>
+        </p:spPr>
+        <p:txBody>
+          <a:bodyPr wrap="square" anchor="t" lIns="0" rIns="0" tIns="0" bIns="0">
+            <a:spAutoFit/>
+          </a:bodyPr>
+          <a:lstStyle/>
+          <a:p>
+            <a:pPr algn="r"/>
+            <a:r>
+              <a:rPr sz="1000" b="1" i="0">
+                <a:solidFill>
+                  <a:srgbClr val="8F989D"/>
+                </a:solidFill>
+                <a:latin typeface="Calibri"/>
+              </a:rPr>
+              <a:t>21</a:t>
+            </a:r>
+          </a:p>
+        </p:txBody>
+      </p:sp>
+    </p:spTree>
+  </p:cSld>
+  <p:clrMapOvr>
+    <a:masterClrMapping/>
+  </p:clrMapOvr>
+</p:sld>
+</file>
+
+<file path=ppt/slides/slide22.xml><?xml version="1.0" encoding="utf-8"?>
+<p:sld xmlns:a="http://schemas.openxmlformats.org/drawingml/2006/main" xmlns:p="http://schemas.openxmlformats.org/presentationml/2006/main" xmlns:r="http://schemas.openxmlformats.org/officeDocument/2006/relationships">
+  <p:cSld>
+    <p:bg>
+      <p:bgPr>
+        <a:solidFill>
+          <a:srgbClr val="FFFFFF"/>
+        </a:solidFill>
+        <a:effectLst/>
+      </p:bgPr>
+    </p:bg>
+    <p:spTree>
+      <p:nvGrpSpPr>
+        <p:cNvPr id="1" name=""/>
+        <p:cNvGrpSpPr/>
+        <p:nvPr/>
+      </p:nvGrpSpPr>
+      <p:grpSpPr/>
+      <p:sp>
+        <p:nvSpPr>
+          <p:cNvPr id="2" name="Rectangle 1"/>
+          <p:cNvSpPr/>
+          <p:nvPr/>
+        </p:nvSpPr>
+        <p:spPr>
+          <a:xfrm>
+            <a:off x="0" y="0"/>
+            <a:ext cx="12191695" cy="1188720"/>
+          </a:xfrm>
+          <a:prstGeom prst="rect">
+            <a:avLst/>
+          </a:prstGeom>
+          <a:solidFill>
+            <a:srgbClr val="0C2340"/>
+          </a:solidFill>
+          <a:ln>
+            <a:noFill/>
+          </a:ln>
+          <a:effectLst/>
+        </p:spPr>
+        <p:style>
+          <a:lnRef idx="1">
+            <a:schemeClr val="accent1"/>
+          </a:lnRef>
+          <a:fillRef idx="3">
+            <a:schemeClr val="accent1"/>
+          </a:fillRef>
+          <a:effectRef idx="2">
+            <a:schemeClr val="accent1"/>
+          </a:effectRef>
+          <a:fontRef idx="minor">
+            <a:schemeClr val="lt1"/>
+          </a:fontRef>
+        </p:style>
+        <p:txBody>
+          <a:bodyPr rtlCol="0" anchor="ctr"/>
+          <a:lstStyle/>
+          <a:p>
+            <a:pPr algn="ctr"/>
+          </a:p>
+        </p:txBody>
+      </p:sp>
+      <p:sp>
+        <p:nvSpPr>
+          <p:cNvPr id="3" name="TextBox 2"/>
+          <p:cNvSpPr txBox="1"/>
+          <p:nvPr/>
+        </p:nvSpPr>
+        <p:spPr>
+          <a:xfrm>
+            <a:off x="640080" y="0"/>
+            <a:ext cx="9082735" cy="1188720"/>
+          </a:xfrm>
+          <a:prstGeom prst="rect">
+            <a:avLst/>
+          </a:prstGeom>
+          <a:noFill/>
+        </p:spPr>
+        <p:txBody>
+          <a:bodyPr wrap="square" anchor="ctr" lIns="0" rIns="0" tIns="0" bIns="0">
+            <a:spAutoFit/>
+          </a:bodyPr>
+          <a:lstStyle/>
+          <a:p>
+            <a:pPr algn="ctr"/>
+            <a:r>
+              <a:rPr sz="2600" b="1" i="0">
+                <a:solidFill>
+                  <a:srgbClr val="FFFFFF"/>
+                </a:solidFill>
+                <a:latin typeface="Calibri"/>
+              </a:rPr>
+              <a:t>RUTA DE ENTREGABLES DEL CURSO</a:t>
+            </a:r>
+          </a:p>
+        </p:txBody>
+      </p:sp>
+      <p:sp>
+        <p:nvSpPr>
+          <p:cNvPr id="4" name="TextBox 3"/>
+          <p:cNvSpPr txBox="1"/>
+          <p:nvPr/>
+        </p:nvSpPr>
+        <p:spPr>
+          <a:xfrm>
+            <a:off x="640080" y="1280160"/>
+            <a:ext cx="10911535" cy="411480"/>
+          </a:xfrm>
+          <a:prstGeom prst="rect">
+            <a:avLst/>
+          </a:prstGeom>
+          <a:noFill/>
+        </p:spPr>
+        <p:txBody>
+          <a:bodyPr wrap="square" anchor="t" lIns="0" rIns="0" tIns="0" bIns="0">
+            <a:spAutoFit/>
+          </a:bodyPr>
+          <a:lstStyle/>
+          <a:p>
+            <a:pPr algn="ctr"/>
+            <a:r>
+              <a:rPr sz="1500" b="0" i="0">
+                <a:solidFill>
+                  <a:srgbClr val="2B2B2B"/>
+                </a:solidFill>
+                <a:latin typeface="Calibri"/>
+              </a:rPr>
+              <a:t>Sin fechas a propósito: aquí va </a:t>
+            </a:r>
+            <a:r>
+              <a:rPr sz="1500" b="1" i="0">
+                <a:solidFill>
+                  <a:srgbClr val="2B2B2B"/>
+                </a:solidFill>
+                <a:latin typeface="Calibri"/>
+              </a:rPr>
+              <a:t>en qué punto del curso</a:t>
+            </a:r>
+            <a:r>
+              <a:rPr sz="1500" b="0" i="0">
+                <a:solidFill>
+                  <a:srgbClr val="2B2B2B"/>
+                </a:solidFill>
+                <a:latin typeface="Calibri"/>
+              </a:rPr>
+              <a:t> cierra cada ítem · la ventana exacta la fija CDigital</a:t>
+            </a:r>
+          </a:p>
+        </p:txBody>
+      </p:sp>
+      <p:graphicFrame>
+        <p:nvGraphicFramePr>
+          <p:cNvPr id="5" name="Table 4"/>
+          <p:cNvGraphicFramePr>
+            <a:graphicFrameLocks noGrp="1"/>
+          </p:cNvGraphicFramePr>
+          <p:nvPr/>
+        </p:nvGraphicFramePr>
+        <p:xfrm>
+          <a:off x="640080" y="2011679"/>
+          <a:ext cx="10911533" cy="4297680"/>
+        </p:xfrm>
+        <a:graphic>
+          <a:graphicData uri="http://schemas.openxmlformats.org/drawingml/2006/table">
+            <a:tbl>
+              <a:tblPr>
+                <a:tableStyleId>{2D5ABB26-0587-4C30-8999-92F81FD0307C}</a:tableStyleId>
+              </a:tblPr>
+              <a:tblGrid>
+                <a:gridCol w="2659113"/>
+                <a:gridCol w="2659113"/>
+                <a:gridCol w="5593307"/>
+              </a:tblGrid>
+              <a:tr h="477520">
+                <a:tc>
+                  <a:txBody>
+                    <a:bodyPr/>
+                    <a:lstStyle/>
+                    <a:p>
+                      <a:pPr algn="l"/>
+                      <a:r>
+                        <a:rPr sz="1300" b="1" i="0">
+                          <a:solidFill>
+                            <a:srgbClr val="FFFFFF"/>
+                          </a:solidFill>
+                          <a:latin typeface="Calibri"/>
+                        </a:rPr>
+                        <a:t>Cierra en la semana de…</a:t>
+                      </a:r>
+                    </a:p>
+                  </a:txBody>
+                  <a:tcPr anchor="ctr" marL="109728" marR="91440" marT="36576" marB="36576">
+                    <a:solidFill>
+                      <a:srgbClr val="0C2340"/>
+                    </a:solidFill>
+                  </a:tcPr>
+                </a:tc>
+                <a:tc>
+                  <a:txBody>
+                    <a:bodyPr/>
+                    <a:lstStyle/>
+                    <a:p>
+                      <a:pPr algn="l"/>
+                      <a:r>
+                        <a:rPr sz="1300" b="1" i="0">
+                          <a:solidFill>
+                            <a:srgbClr val="FFFFFF"/>
+                          </a:solidFill>
+                          <a:latin typeface="Calibri"/>
+                        </a:rPr>
+                        <a:t>Entregable</a:t>
+                      </a:r>
+                    </a:p>
+                  </a:txBody>
+                  <a:tcPr anchor="ctr" marL="109728" marR="91440" marT="36576" marB="36576">
+                    <a:solidFill>
+                      <a:srgbClr val="0C2340"/>
+                    </a:solidFill>
+                  </a:tcPr>
+                </a:tc>
+                <a:tc>
+                  <a:txBody>
+                    <a:bodyPr/>
+                    <a:lstStyle/>
+                    <a:p>
+                      <a:pPr algn="l"/>
+                      <a:r>
+                        <a:rPr sz="1300" b="1" i="0">
+                          <a:solidFill>
+                            <a:srgbClr val="FFFFFF"/>
+                          </a:solidFill>
+                          <a:latin typeface="Calibri"/>
+                        </a:rPr>
+                        <a:t>Qué debes tener listo</a:t>
+                      </a:r>
+                    </a:p>
+                  </a:txBody>
+                  <a:tcPr anchor="ctr" marL="109728" marR="91440" marT="36576" marB="36576">
+                    <a:solidFill>
+                      <a:srgbClr val="0C2340"/>
+                    </a:solidFill>
+                  </a:tcPr>
+                </a:tc>
+              </a:tr>
+              <a:tr h="477520">
+                <a:tc>
+                  <a:txBody>
+                    <a:bodyPr/>
+                    <a:lstStyle/>
+                    <a:p>
+                      <a:pPr algn="l"/>
+                      <a:r>
+                        <a:rPr sz="1100" b="1" i="0">
+                          <a:solidFill>
+                            <a:srgbClr val="2B2B2B"/>
+                          </a:solidFill>
+                          <a:latin typeface="Calibri"/>
+                        </a:rPr>
+                        <a:t>Sesión 02</a:t>
+                      </a:r>
+                      <a:r>
+                        <a:rPr sz="1100" b="0" i="0">
+                          <a:solidFill>
+                            <a:srgbClr val="2B2B2B"/>
+                          </a:solidFill>
+                          <a:latin typeface="Calibri"/>
+                        </a:rPr>
+                        <a:t> · ya cerró</a:t>
+                      </a:r>
+                    </a:p>
+                  </a:txBody>
+                  <a:tcPr anchor="ctr" marL="109728" marR="91440" marT="36576" marB="36576">
+                    <a:solidFill>
+                      <a:srgbClr val="FFFFFF"/>
+                    </a:solidFill>
+                  </a:tcPr>
+                </a:tc>
+                <a:tc>
+                  <a:txBody>
+                    <a:bodyPr/>
+                    <a:lstStyle/>
+                    <a:p>
+                      <a:pPr algn="l"/>
+                      <a:r>
+                        <a:rPr sz="1100" b="1" i="0">
+                          <a:solidFill>
+                            <a:srgbClr val="2B2B2B"/>
+                          </a:solidFill>
+                          <a:latin typeface="Calibri"/>
+                        </a:rPr>
+                        <a:t>Quiz 1</a:t>
+                      </a:r>
+                      <a:r>
+                        <a:rPr sz="1100" b="0" i="0">
+                          <a:solidFill>
+                            <a:srgbClr val="2B2B2B"/>
+                          </a:solidFill>
+                          <a:latin typeface="Calibri"/>
+                        </a:rPr>
+                        <a:t> · Cuestionario · 6%</a:t>
+                      </a:r>
+                    </a:p>
+                  </a:txBody>
+                  <a:tcPr anchor="ctr" marL="109728" marR="91440" marT="36576" marB="36576">
+                    <a:solidFill>
+                      <a:srgbClr val="FFFFFF"/>
+                    </a:solidFill>
+                  </a:tcPr>
+                </a:tc>
+                <a:tc>
+                  <a:txBody>
+                    <a:bodyPr/>
+                    <a:lstStyle/>
+                    <a:p>
+                      <a:pPr algn="l"/>
+                      <a:r>
+                        <a:rPr sz="1100" b="0" i="0">
+                          <a:solidFill>
+                            <a:srgbClr val="2B2B2B"/>
+                          </a:solidFill>
+                          <a:latin typeface="Calibri"/>
+                        </a:rPr>
+                        <a:t>Ten leída la unidad del encuadre: </a:t>
+                      </a:r>
+                      <a:r>
+                        <a:rPr sz="1100" b="1" i="0">
+                          <a:solidFill>
+                            <a:srgbClr val="2B2B2B"/>
+                          </a:solidFill>
+                          <a:latin typeface="Calibri"/>
+                        </a:rPr>
+                        <a:t>Propuesta de Innovación</a:t>
+                      </a:r>
+                      <a:r>
+                        <a:rPr sz="1100" b="0" i="0">
+                          <a:solidFill>
+                            <a:srgbClr val="2B2B2B"/>
+                          </a:solidFill>
+                          <a:latin typeface="Calibri"/>
+                        </a:rPr>
+                        <a:t> e inteligencia emocional.</a:t>
+                      </a:r>
+                    </a:p>
+                  </a:txBody>
+                  <a:tcPr anchor="ctr" marL="109728" marR="91440" marT="36576" marB="36576">
+                    <a:solidFill>
+                      <a:srgbClr val="FFFFFF"/>
+                    </a:solidFill>
+                  </a:tcPr>
+                </a:tc>
+              </a:tr>
+              <a:tr h="477520">
+                <a:tc>
+                  <a:txBody>
+                    <a:bodyPr/>
+                    <a:lstStyle/>
+                    <a:p>
+                      <a:pPr algn="l"/>
+                      <a:r>
+                        <a:rPr sz="1100" b="1" i="0">
+                          <a:solidFill>
+                            <a:srgbClr val="2B2B2B"/>
+                          </a:solidFill>
+                          <a:latin typeface="Calibri"/>
+                        </a:rPr>
+                        <a:t>Sesión 03</a:t>
+                      </a:r>
+                      <a:r>
+                        <a:rPr sz="1100" b="0" i="0">
+                          <a:solidFill>
+                            <a:srgbClr val="2B2B2B"/>
+                          </a:solidFill>
+                          <a:latin typeface="Calibri"/>
+                        </a:rPr>
+                        <a:t> · cierra esta semana</a:t>
+                      </a:r>
+                    </a:p>
+                  </a:txBody>
+                  <a:tcPr anchor="ctr" marL="109728" marR="91440" marT="36576" marB="36576">
+                    <a:solidFill>
+                      <a:srgbClr val="F2F2F2"/>
+                    </a:solidFill>
+                  </a:tcPr>
+                </a:tc>
+                <a:tc>
+                  <a:txBody>
+                    <a:bodyPr/>
+                    <a:lstStyle/>
+                    <a:p>
+                      <a:pPr algn="l"/>
+                      <a:r>
+                        <a:rPr sz="1100" b="1" i="0">
+                          <a:solidFill>
+                            <a:srgbClr val="2B2B2B"/>
+                          </a:solidFill>
+                          <a:latin typeface="Calibri"/>
+                        </a:rPr>
+                        <a:t>Parcial 1</a:t>
+                      </a:r>
+                      <a:r>
+                        <a:rPr sz="1100" b="0" i="0">
+                          <a:solidFill>
+                            <a:srgbClr val="2B2B2B"/>
+                          </a:solidFill>
+                          <a:latin typeface="Calibri"/>
+                        </a:rPr>
+                        <a:t> · Cuestionario · 24%</a:t>
+                      </a:r>
+                    </a:p>
+                  </a:txBody>
+                  <a:tcPr anchor="ctr" marL="109728" marR="91440" marT="36576" marB="36576">
+                    <a:solidFill>
+                      <a:srgbClr val="F2F2F2"/>
+                    </a:solidFill>
+                  </a:tcPr>
+                </a:tc>
+                <a:tc>
+                  <a:txBody>
+                    <a:bodyPr/>
+                    <a:lstStyle/>
+                    <a:p>
+                      <a:pPr algn="l"/>
+                      <a:r>
+                        <a:rPr sz="1100" b="0" i="0">
+                          <a:solidFill>
+                            <a:srgbClr val="2B2B2B"/>
+                          </a:solidFill>
+                          <a:latin typeface="Calibri"/>
+                        </a:rPr>
+                        <a:t>Domina </a:t>
+                      </a:r>
+                      <a:r>
+                        <a:rPr sz="1100" b="1" i="0">
+                          <a:solidFill>
+                            <a:srgbClr val="2B2B2B"/>
+                          </a:solidFill>
+                          <a:latin typeface="Calibri"/>
+                        </a:rPr>
+                        <a:t>Design Thinking</a:t>
+                      </a:r>
+                      <a:r>
+                        <a:rPr sz="1100" b="0" i="0">
+                          <a:solidFill>
+                            <a:srgbClr val="2B2B2B"/>
+                          </a:solidFill>
+                          <a:latin typeface="Calibri"/>
+                        </a:rPr>
+                        <a:t>, dos técnicas de ideación, bloqueadores y ensanchadores.</a:t>
+                      </a:r>
+                    </a:p>
+                  </a:txBody>
+                  <a:tcPr anchor="ctr" marL="109728" marR="91440" marT="36576" marB="36576">
+                    <a:solidFill>
+                      <a:srgbClr val="F2F2F2"/>
+                    </a:solidFill>
+                  </a:tcPr>
+                </a:tc>
+              </a:tr>
+              <a:tr h="477520">
+                <a:tc>
+                  <a:txBody>
+                    <a:bodyPr/>
+                    <a:lstStyle/>
+                    <a:p>
+                      <a:pPr algn="l"/>
+                      <a:r>
+                        <a:rPr sz="1100" b="1" i="0">
+                          <a:solidFill>
+                            <a:srgbClr val="2B2B2B"/>
+                          </a:solidFill>
+                          <a:latin typeface="Calibri"/>
+                        </a:rPr>
+                        <a:t>Sesión 04</a:t>
+                      </a:r>
+                      <a:r>
+                        <a:rPr sz="1100" b="0" i="0">
+                          <a:solidFill>
+                            <a:srgbClr val="2B2B2B"/>
+                          </a:solidFill>
+                          <a:latin typeface="Calibri"/>
+                        </a:rPr>
+                        <a:t> · pendiente</a:t>
+                      </a:r>
+                    </a:p>
+                  </a:txBody>
+                  <a:tcPr anchor="ctr" marL="109728" marR="91440" marT="36576" marB="36576">
+                    <a:solidFill>
+                      <a:srgbClr val="FFFFFF"/>
+                    </a:solidFill>
+                  </a:tcPr>
+                </a:tc>
+                <a:tc>
+                  <a:txBody>
+                    <a:bodyPr/>
+                    <a:lstStyle/>
+                    <a:p>
+                      <a:pPr algn="l"/>
+                      <a:r>
+                        <a:rPr sz="1100" b="1" i="0">
+                          <a:solidFill>
+                            <a:srgbClr val="2B2B2B"/>
+                          </a:solidFill>
+                          <a:latin typeface="Calibri"/>
+                        </a:rPr>
+                        <a:t>Quiz 2</a:t>
+                      </a:r>
+                      <a:r>
+                        <a:rPr sz="1100" b="0" i="0">
+                          <a:solidFill>
+                            <a:srgbClr val="2B2B2B"/>
+                          </a:solidFill>
+                          <a:latin typeface="Calibri"/>
+                        </a:rPr>
+                        <a:t> · Cuestionario · 9%</a:t>
+                      </a:r>
+                    </a:p>
+                  </a:txBody>
+                  <a:tcPr anchor="ctr" marL="109728" marR="91440" marT="36576" marB="36576">
+                    <a:solidFill>
+                      <a:srgbClr val="FFFFFF"/>
+                    </a:solidFill>
+                  </a:tcPr>
+                </a:tc>
+                <a:tc>
+                  <a:txBody>
+                    <a:bodyPr/>
+                    <a:lstStyle/>
+                    <a:p>
+                      <a:pPr algn="l"/>
+                      <a:r>
+                        <a:rPr sz="1100" b="0" i="0">
+                          <a:solidFill>
+                            <a:srgbClr val="2B2B2B"/>
+                          </a:solidFill>
+                          <a:latin typeface="Calibri"/>
+                        </a:rPr>
+                        <a:t>Suma el </a:t>
+                      </a:r>
+                      <a:r>
+                        <a:rPr sz="1100" b="1" i="0">
+                          <a:solidFill>
+                            <a:srgbClr val="2B2B2B"/>
+                          </a:solidFill>
+                          <a:latin typeface="Calibri"/>
+                        </a:rPr>
+                        <a:t>Manual de Oslo</a:t>
+                      </a:r>
+                      <a:r>
+                        <a:rPr sz="1100" b="0" i="0">
+                          <a:solidFill>
+                            <a:srgbClr val="2B2B2B"/>
+                          </a:solidFill>
+                          <a:latin typeface="Calibri"/>
+                        </a:rPr>
+                        <a:t>: qué cuenta como innovación y cómo se gestiona; el curso acumula.</a:t>
+                      </a:r>
+                    </a:p>
+                  </a:txBody>
+                  <a:tcPr anchor="ctr" marL="109728" marR="91440" marT="36576" marB="36576">
+                    <a:solidFill>
+                      <a:srgbClr val="FFFFFF"/>
+                    </a:solidFill>
+                  </a:tcPr>
+                </a:tc>
+              </a:tr>
+              <a:tr h="477520">
+                <a:tc>
+                  <a:txBody>
+                    <a:bodyPr/>
+                    <a:lstStyle/>
+                    <a:p>
+                      <a:pPr algn="l"/>
+                      <a:r>
+                        <a:rPr sz="1100" b="1" i="0">
+                          <a:solidFill>
+                            <a:srgbClr val="2B2B2B"/>
+                          </a:solidFill>
+                          <a:latin typeface="Calibri"/>
+                        </a:rPr>
+                        <a:t>Sesión 05</a:t>
+                      </a:r>
+                      <a:r>
+                        <a:rPr sz="1100" b="0" i="0">
+                          <a:solidFill>
+                            <a:srgbClr val="2B2B2B"/>
+                          </a:solidFill>
+                          <a:latin typeface="Calibri"/>
+                        </a:rPr>
+                        <a:t> · pendiente</a:t>
+                      </a:r>
+                    </a:p>
+                  </a:txBody>
+                  <a:tcPr anchor="ctr" marL="109728" marR="91440" marT="36576" marB="36576">
+                    <a:solidFill>
+                      <a:srgbClr val="F2F2F2"/>
+                    </a:solidFill>
+                  </a:tcPr>
+                </a:tc>
+                <a:tc>
+                  <a:txBody>
+                    <a:bodyPr/>
+                    <a:lstStyle/>
+                    <a:p>
+                      <a:pPr algn="l"/>
+                      <a:r>
+                        <a:rPr sz="1100" b="1" i="0">
+                          <a:solidFill>
+                            <a:srgbClr val="2B2B2B"/>
+                          </a:solidFill>
+                          <a:latin typeface="Calibri"/>
+                        </a:rPr>
+                        <a:t>Parcial 2</a:t>
+                      </a:r>
+                      <a:r>
+                        <a:rPr sz="1100" b="0" i="0">
+                          <a:solidFill>
+                            <a:srgbClr val="2B2B2B"/>
+                          </a:solidFill>
+                          <a:latin typeface="Calibri"/>
+                        </a:rPr>
+                        <a:t> · Cuestionario · 21%</a:t>
+                      </a:r>
+                    </a:p>
+                  </a:txBody>
+                  <a:tcPr anchor="ctr" marL="109728" marR="91440" marT="36576" marB="36576">
+                    <a:solidFill>
+                      <a:srgbClr val="F2F2F2"/>
+                    </a:solidFill>
+                  </a:tcPr>
+                </a:tc>
+                <a:tc>
+                  <a:txBody>
+                    <a:bodyPr/>
+                    <a:lstStyle/>
+                    <a:p>
+                      <a:pPr algn="l"/>
+                      <a:r>
+                        <a:rPr sz="1100" b="0" i="0">
+                          <a:solidFill>
+                            <a:srgbClr val="2B2B2B"/>
+                          </a:solidFill>
+                          <a:latin typeface="Calibri"/>
+                        </a:rPr>
+                        <a:t>Tipifica tu innovación (producto, proceso, organización, marketing, social) y </a:t>
+                      </a:r>
+                      <a:r>
+                        <a:rPr sz="1100" b="1" i="0">
+                          <a:solidFill>
+                            <a:srgbClr val="2B2B2B"/>
+                          </a:solidFill>
+                          <a:latin typeface="Calibri"/>
+                        </a:rPr>
+                        <a:t>justifícala</a:t>
+                      </a:r>
+                      <a:r>
+                        <a:rPr sz="1100" b="0" i="0">
+                          <a:solidFill>
+                            <a:srgbClr val="2B2B2B"/>
+                          </a:solidFill>
+                          <a:latin typeface="Calibri"/>
+                        </a:rPr>
+                        <a:t>.</a:t>
+                      </a:r>
+                    </a:p>
+                  </a:txBody>
+                  <a:tcPr anchor="ctr" marL="109728" marR="91440" marT="36576" marB="36576">
+                    <a:solidFill>
+                      <a:srgbClr val="F2F2F2"/>
+                    </a:solidFill>
+                  </a:tcPr>
+                </a:tc>
+              </a:tr>
+              <a:tr h="477520">
+                <a:tc>
+                  <a:txBody>
+                    <a:bodyPr/>
+                    <a:lstStyle/>
+                    <a:p>
+                      <a:pPr algn="l"/>
+                      <a:r>
+                        <a:rPr sz="1100" b="1" i="0">
+                          <a:solidFill>
+                            <a:srgbClr val="2B2B2B"/>
+                          </a:solidFill>
+                          <a:latin typeface="Calibri"/>
+                        </a:rPr>
+                        <a:t>Sesión 06</a:t>
+                      </a:r>
+                      <a:r>
+                        <a:rPr sz="1100" b="0" i="0">
+                          <a:solidFill>
+                            <a:srgbClr val="2B2B2B"/>
+                          </a:solidFill>
+                          <a:latin typeface="Calibri"/>
+                        </a:rPr>
+                        <a:t> · pendiente</a:t>
+                      </a:r>
+                    </a:p>
+                  </a:txBody>
+                  <a:tcPr anchor="ctr" marL="109728" marR="91440" marT="36576" marB="36576">
+                    <a:solidFill>
+                      <a:srgbClr val="FFFFFF"/>
+                    </a:solidFill>
+                  </a:tcPr>
+                </a:tc>
+                <a:tc>
+                  <a:txBody>
+                    <a:bodyPr/>
+                    <a:lstStyle/>
+                    <a:p>
+                      <a:pPr algn="l"/>
+                      <a:r>
+                        <a:rPr sz="1100" b="1" i="0">
+                          <a:solidFill>
+                            <a:srgbClr val="2B2B2B"/>
+                          </a:solidFill>
+                          <a:latin typeface="Calibri"/>
+                        </a:rPr>
+                        <a:t>ACA Final</a:t>
+                      </a:r>
+                      <a:r>
+                        <a:rPr sz="1100" b="0" i="0">
+                          <a:solidFill>
+                            <a:srgbClr val="2B2B2B"/>
+                          </a:solidFill>
+                          <a:latin typeface="Calibri"/>
+                        </a:rPr>
+                        <a:t> · Tarea · 32,8%</a:t>
+                      </a:r>
+                    </a:p>
+                  </a:txBody>
+                  <a:tcPr anchor="ctr" marL="109728" marR="91440" marT="36576" marB="36576">
+                    <a:solidFill>
+                      <a:srgbClr val="FFFFFF"/>
+                    </a:solidFill>
+                  </a:tcPr>
+                </a:tc>
+                <a:tc>
+                  <a:txBody>
+                    <a:bodyPr/>
+                    <a:lstStyle/>
+                    <a:p>
+                      <a:pPr algn="l"/>
+                      <a:r>
+                        <a:rPr sz="1100" b="0" i="0">
+                          <a:solidFill>
+                            <a:srgbClr val="2B2B2B"/>
+                          </a:solidFill>
+                          <a:latin typeface="Calibri"/>
+                        </a:rPr>
+                        <a:t>Sube la </a:t>
+                      </a:r>
+                      <a:r>
+                        <a:rPr sz="1100" b="1" i="0">
+                          <a:solidFill>
+                            <a:srgbClr val="2B2B2B"/>
+                          </a:solidFill>
+                          <a:latin typeface="Calibri"/>
+                        </a:rPr>
+                        <a:t>propuesta consolidada</a:t>
+                      </a:r>
+                      <a:r>
+                        <a:rPr sz="1100" b="0" i="0">
+                          <a:solidFill>
+                            <a:srgbClr val="2B2B2B"/>
+                          </a:solidFill>
+                          <a:latin typeface="Calibri"/>
+                        </a:rPr>
+                        <a:t>: problema, tipo Oslo, FODA, Canvas, MVP, vigilancia y pitch.</a:t>
+                      </a:r>
+                    </a:p>
+                  </a:txBody>
+                  <a:tcPr anchor="ctr" marL="109728" marR="91440" marT="36576" marB="36576">
+                    <a:solidFill>
+                      <a:srgbClr val="FFFFFF"/>
+                    </a:solidFill>
+                  </a:tcPr>
+                </a:tc>
+              </a:tr>
+              <a:tr h="477520">
+                <a:tc>
+                  <a:txBody>
+                    <a:bodyPr/>
+                    <a:lstStyle/>
+                    <a:p>
+                      <a:pPr algn="l"/>
+                      <a:r>
+                        <a:rPr sz="1100" b="1" i="0">
+                          <a:solidFill>
+                            <a:srgbClr val="2B2B2B"/>
+                          </a:solidFill>
+                          <a:latin typeface="Calibri"/>
+                        </a:rPr>
+                        <a:t>Sesión 06</a:t>
+                      </a:r>
+                      <a:r>
+                        <a:rPr sz="1100" b="0" i="0">
+                          <a:solidFill>
+                            <a:srgbClr val="2B2B2B"/>
+                          </a:solidFill>
+                          <a:latin typeface="Calibri"/>
+                        </a:rPr>
+                        <a:t> · pendiente</a:t>
+                      </a:r>
+                    </a:p>
+                  </a:txBody>
+                  <a:tcPr anchor="ctr" marL="109728" marR="91440" marT="36576" marB="36576">
+                    <a:solidFill>
+                      <a:srgbClr val="F2F2F2"/>
+                    </a:solidFill>
+                  </a:tcPr>
+                </a:tc>
+                <a:tc>
+                  <a:txBody>
+                    <a:bodyPr/>
+                    <a:lstStyle/>
+                    <a:p>
+                      <a:pPr algn="l"/>
+                      <a:r>
+                        <a:rPr sz="1100" b="1" i="0">
+                          <a:solidFill>
+                            <a:srgbClr val="2B2B2B"/>
+                          </a:solidFill>
+                          <a:latin typeface="Calibri"/>
+                        </a:rPr>
+                        <a:t>Quiz 3</a:t>
+                      </a:r>
+                      <a:r>
+                        <a:rPr sz="1100" b="0" i="0">
+                          <a:solidFill>
+                            <a:srgbClr val="2B2B2B"/>
+                          </a:solidFill>
+                          <a:latin typeface="Calibri"/>
+                        </a:rPr>
+                        <a:t> · Cuestionario · 4%</a:t>
+                      </a:r>
+                    </a:p>
+                  </a:txBody>
+                  <a:tcPr anchor="ctr" marL="109728" marR="91440" marT="36576" marB="36576">
+                    <a:solidFill>
+                      <a:srgbClr val="F2F2F2"/>
+                    </a:solidFill>
+                  </a:tcPr>
+                </a:tc>
+                <a:tc>
+                  <a:txBody>
+                    <a:bodyPr/>
+                    <a:lstStyle/>
+                    <a:p>
+                      <a:pPr algn="l"/>
+                      <a:r>
+                        <a:rPr sz="1100" b="0" i="0">
+                          <a:solidFill>
+                            <a:srgbClr val="2B2B2B"/>
+                          </a:solidFill>
+                          <a:latin typeface="Calibri"/>
+                        </a:rPr>
+                        <a:t>Ten claros </a:t>
+                      </a:r>
+                      <a:r>
+                        <a:rPr sz="1100" b="1" i="0">
+                          <a:solidFill>
+                            <a:srgbClr val="2B2B2B"/>
+                          </a:solidFill>
+                          <a:latin typeface="Calibri"/>
+                        </a:rPr>
+                        <a:t>FODA, Canvas y MVP</a:t>
+                      </a:r>
+                      <a:r>
+                        <a:rPr sz="1100" b="0" i="0">
+                          <a:solidFill>
+                            <a:srgbClr val="2B2B2B"/>
+                          </a:solidFill>
+                          <a:latin typeface="Calibri"/>
+                        </a:rPr>
+                        <a:t> (verificable) y para qué sirve la vigilancia tecnológica.</a:t>
+                      </a:r>
+                    </a:p>
+                  </a:txBody>
+                  <a:tcPr anchor="ctr" marL="109728" marR="91440" marT="36576" marB="36576">
+                    <a:solidFill>
+                      <a:srgbClr val="F2F2F2"/>
+                    </a:solidFill>
+                  </a:tcPr>
+                </a:tc>
+              </a:tr>
+              <a:tr h="477520">
+                <a:tc>
+                  <a:txBody>
+                    <a:bodyPr/>
+                    <a:lstStyle/>
+                    <a:p>
+                      <a:pPr algn="l"/>
+                      <a:r>
+                        <a:rPr sz="1100" b="1" i="0">
+                          <a:solidFill>
+                            <a:srgbClr val="2B2B2B"/>
+                          </a:solidFill>
+                          <a:latin typeface="Calibri"/>
+                        </a:rPr>
+                        <a:t>Sesión 07</a:t>
+                      </a:r>
+                      <a:r>
+                        <a:rPr sz="1100" b="0" i="0">
+                          <a:solidFill>
+                            <a:srgbClr val="2B2B2B"/>
+                          </a:solidFill>
+                          <a:latin typeface="Calibri"/>
+                        </a:rPr>
+                        <a:t> · pendiente</a:t>
+                      </a:r>
+                    </a:p>
+                  </a:txBody>
+                  <a:tcPr anchor="ctr" marL="109728" marR="91440" marT="36576" marB="36576">
+                    <a:solidFill>
+                      <a:srgbClr val="FFFFFF"/>
+                    </a:solidFill>
+                  </a:tcPr>
+                </a:tc>
+                <a:tc>
+                  <a:txBody>
+                    <a:bodyPr/>
+                    <a:lstStyle/>
+                    <a:p>
+                      <a:pPr algn="l"/>
+                      <a:r>
+                        <a:rPr sz="1100" b="1" i="0">
+                          <a:solidFill>
+                            <a:srgbClr val="2B2B2B"/>
+                          </a:solidFill>
+                          <a:latin typeface="Calibri"/>
+                        </a:rPr>
+                        <a:t>Autoevaluación</a:t>
+                      </a:r>
+                      <a:r>
+                        <a:rPr sz="1100" b="0" i="0">
+                          <a:solidFill>
+                            <a:srgbClr val="2B2B2B"/>
+                          </a:solidFill>
+                          <a:latin typeface="Calibri"/>
+                        </a:rPr>
+                        <a:t> · Cuestionario · 1,6%</a:t>
+                      </a:r>
+                    </a:p>
+                  </a:txBody>
+                  <a:tcPr anchor="ctr" marL="109728" marR="91440" marT="36576" marB="36576">
+                    <a:solidFill>
+                      <a:srgbClr val="FFFFFF"/>
+                    </a:solidFill>
+                  </a:tcPr>
+                </a:tc>
+                <a:tc>
+                  <a:txBody>
+                    <a:bodyPr/>
+                    <a:lstStyle/>
+                    <a:p>
+                      <a:pPr algn="l"/>
+                      <a:r>
+                        <a:rPr sz="1100" b="0" i="0">
+                          <a:solidFill>
+                            <a:srgbClr val="2B2B2B"/>
+                          </a:solidFill>
+                          <a:latin typeface="Calibri"/>
+                        </a:rPr>
+                        <a:t>Diligénciala tú, y solo tú, </a:t>
+                      </a:r>
+                      <a:r>
+                        <a:rPr sz="1100" b="1" i="0">
+                          <a:solidFill>
+                            <a:srgbClr val="2B2B2B"/>
+                          </a:solidFill>
+                          <a:latin typeface="Calibri"/>
+                        </a:rPr>
+                        <a:t>con honestidad</a:t>
+                      </a:r>
+                      <a:r>
+                        <a:rPr sz="1100" b="0" i="0">
+                          <a:solidFill>
+                            <a:srgbClr val="2B2B2B"/>
+                          </a:solidFill>
+                          <a:latin typeface="Calibri"/>
+                        </a:rPr>
+                        <a:t> sobre tu participación real.</a:t>
+                      </a:r>
+                    </a:p>
+                  </a:txBody>
+                  <a:tcPr anchor="ctr" marL="109728" marR="91440" marT="36576" marB="36576">
+                    <a:solidFill>
+                      <a:srgbClr val="FFFFFF"/>
+                    </a:solidFill>
+                  </a:tcPr>
+                </a:tc>
+              </a:tr>
+              <a:tr h="477520">
+                <a:tc>
+                  <a:txBody>
+                    <a:bodyPr/>
+                    <a:lstStyle/>
+                    <a:p>
+                      <a:pPr algn="l"/>
+                      <a:r>
+                        <a:rPr sz="1100" b="1" i="0">
+                          <a:solidFill>
+                            <a:srgbClr val="2B2B2B"/>
+                          </a:solidFill>
+                          <a:latin typeface="Calibri"/>
+                        </a:rPr>
+                        <a:t>Sesión 07</a:t>
+                      </a:r>
+                      <a:r>
+                        <a:rPr sz="1100" b="0" i="0">
+                          <a:solidFill>
+                            <a:srgbClr val="2B2B2B"/>
+                          </a:solidFill>
+                          <a:latin typeface="Calibri"/>
+                        </a:rPr>
+                        <a:t> · pendiente</a:t>
+                      </a:r>
+                    </a:p>
+                  </a:txBody>
+                  <a:tcPr anchor="ctr" marL="109728" marR="91440" marT="36576" marB="36576">
+                    <a:solidFill>
+                      <a:srgbClr val="F2F2F2"/>
+                    </a:solidFill>
+                  </a:tcPr>
+                </a:tc>
+                <a:tc>
+                  <a:txBody>
+                    <a:bodyPr/>
+                    <a:lstStyle/>
+                    <a:p>
+                      <a:pPr algn="l"/>
+                      <a:r>
+                        <a:rPr sz="1100" b="1" i="0">
+                          <a:solidFill>
+                            <a:srgbClr val="2B2B2B"/>
+                          </a:solidFill>
+                          <a:latin typeface="Calibri"/>
+                        </a:rPr>
+                        <a:t>Coevaluación</a:t>
+                      </a:r>
+                      <a:r>
+                        <a:rPr sz="1100" b="0" i="0">
+                          <a:solidFill>
+                            <a:srgbClr val="2B2B2B"/>
+                          </a:solidFill>
+                          <a:latin typeface="Calibri"/>
+                        </a:rPr>
+                        <a:t> · Foro · 1,6%</a:t>
+                      </a:r>
+                    </a:p>
+                  </a:txBody>
+                  <a:tcPr anchor="ctr" marL="109728" marR="91440" marT="36576" marB="36576">
+                    <a:solidFill>
+                      <a:srgbClr val="F2F2F2"/>
+                    </a:solidFill>
+                  </a:tcPr>
+                </a:tc>
+                <a:tc>
+                  <a:txBody>
+                    <a:bodyPr/>
+                    <a:lstStyle/>
+                    <a:p>
+                      <a:pPr algn="l"/>
+                      <a:r>
+                        <a:rPr sz="1100" b="1" i="0">
+                          <a:solidFill>
+                            <a:srgbClr val="2B2B2B"/>
+                          </a:solidFill>
+                          <a:latin typeface="Calibri"/>
+                        </a:rPr>
+                        <a:t>Publica</a:t>
+                      </a:r>
+                      <a:r>
+                        <a:rPr sz="1100" b="0" i="0">
+                          <a:solidFill>
+                            <a:srgbClr val="2B2B2B"/>
+                          </a:solidFill>
+                          <a:latin typeface="Calibri"/>
+                        </a:rPr>
+                        <a:t> tu aporte: valora hechos del trabajo en equipo, no a las personas.</a:t>
+                      </a:r>
+                    </a:p>
+                  </a:txBody>
+                  <a:tcPr anchor="ctr" marL="109728" marR="91440" marT="36576" marB="36576">
+                    <a:solidFill>
+                      <a:srgbClr val="F2F2F2"/>
+                    </a:solidFill>
+                  </a:tcPr>
+                </a:tc>
+              </a:tr>
+            </a:tbl>
+          </a:graphicData>
+        </a:graphic>
+      </p:graphicFrame>
+      <p:sp>
+        <p:nvSpPr>
+          <p:cNvPr id="6" name="TextBox 5"/>
+          <p:cNvSpPr txBox="1"/>
+          <p:nvPr/>
+        </p:nvSpPr>
+        <p:spPr>
+          <a:xfrm>
+            <a:off x="640080" y="6080760"/>
+            <a:ext cx="10911535" cy="548640"/>
+          </a:xfrm>
+          <a:prstGeom prst="rect">
+            <a:avLst/>
+          </a:prstGeom>
+          <a:noFill/>
+        </p:spPr>
+        <p:txBody>
+          <a:bodyPr wrap="square" anchor="t" lIns="0" rIns="0" tIns="0" bIns="0">
+            <a:spAutoFit/>
+          </a:bodyPr>
+          <a:lstStyle/>
+          <a:p>
+            <a:r>
+              <a:rPr sz="1200" b="0" i="1">
+                <a:solidFill>
+                  <a:srgbClr val="2B2B2B"/>
+                </a:solidFill>
+                <a:latin typeface="Calibri"/>
+              </a:rPr>
+              <a:t>Esta misma tabla va al final de todas las sesiones. La </a:t>
+            </a:r>
+            <a:r>
+              <a:rPr sz="1200" b="1" i="1">
+                <a:solidFill>
+                  <a:srgbClr val="2B2B2B"/>
+                </a:solidFill>
+                <a:latin typeface="Calibri"/>
+              </a:rPr>
+              <a:t>fecha</a:t>
+            </a:r>
+            <a:r>
+              <a:rPr sz="1200" b="0" i="1">
+                <a:solidFill>
+                  <a:srgbClr val="2B2B2B"/>
+                </a:solidFill>
+                <a:latin typeface="Calibri"/>
+              </a:rPr>
+              <a:t> de cada ventana está en el enunciado del ítem (`Clases/Recursos/ACAs/`) y en el aula: si el aula y cualquier otro material se contradicen, </a:t>
+            </a:r>
+            <a:r>
+              <a:rPr sz="1200" b="1" i="1">
+                <a:solidFill>
+                  <a:srgbClr val="2B2B2B"/>
+                </a:solidFill>
+                <a:latin typeface="Calibri"/>
+              </a:rPr>
+              <a:t>manda el aula</a:t>
+            </a:r>
+            <a:r>
+              <a:rPr sz="1200" b="0" i="1">
+                <a:solidFill>
+                  <a:srgbClr val="2B2B2B"/>
+                </a:solidFill>
+                <a:latin typeface="Calibri"/>
+              </a:rPr>
+              <a:t>.</a:t>
+            </a:r>
+          </a:p>
+        </p:txBody>
+      </p:sp>
+      <p:sp>
+        <p:nvSpPr>
+          <p:cNvPr id="7" name="TextBox 6"/>
+          <p:cNvSpPr txBox="1"/>
+          <p:nvPr/>
+        </p:nvSpPr>
+        <p:spPr>
+          <a:xfrm>
+            <a:off x="11094415" y="6446520"/>
+            <a:ext cx="548640" cy="274320"/>
+          </a:xfrm>
+          <a:prstGeom prst="rect">
+            <a:avLst/>
+          </a:prstGeom>
+          <a:noFill/>
+        </p:spPr>
+        <p:txBody>
+          <a:bodyPr wrap="square" anchor="t" lIns="0" rIns="0" tIns="0" bIns="0">
+            <a:spAutoFit/>
+          </a:bodyPr>
+          <a:lstStyle/>
+          <a:p>
+            <a:pPr algn="r"/>
+            <a:r>
+              <a:rPr sz="1000" b="1" i="0">
+                <a:solidFill>
+                  <a:srgbClr val="8F989D"/>
+                </a:solidFill>
+                <a:latin typeface="Calibri"/>
+              </a:rPr>
+              <a:t>22</a:t>
+            </a:r>
+          </a:p>
+        </p:txBody>
+      </p:sp>
+    </p:spTree>
+  </p:cSld>
+  <p:clrMapOvr>
+    <a:masterClrMapping/>
+  </p:clrMapOvr>
+</p:sld>
+</file>
+
+<file path=ppt/slides/slide23.xml><?xml version="1.0" encoding="utf-8"?>
 <p:sld xmlns:a="http://schemas.openxmlformats.org/drawingml/2006/main" xmlns:p="http://schemas.openxmlformats.org/presentationml/2006/main" xmlns:r="http://schemas.openxmlformats.org/officeDocument/2006/relationships">
   <p:cSld>
     <p:bg>
